--- a/DRP_Defense_Presentation.pptx
+++ b/DRP_Defense_Presentation.pptx
@@ -23,28 +23,6 @@
     <p:sldId id="271" r:id="rId22"/>
     <p:sldId id="272" r:id="rId23"/>
     <p:sldId id="273" r:id="rId24"/>
-    <p:sldId id="274" r:id="rId25"/>
-    <p:sldId id="275" r:id="rId26"/>
-    <p:sldId id="276" r:id="rId27"/>
-    <p:sldId id="277" r:id="rId28"/>
-    <p:sldId id="278" r:id="rId29"/>
-    <p:sldId id="279" r:id="rId30"/>
-    <p:sldId id="280" r:id="rId31"/>
-    <p:sldId id="281" r:id="rId32"/>
-    <p:sldId id="282" r:id="rId33"/>
-    <p:sldId id="283" r:id="rId34"/>
-    <p:sldId id="284" r:id="rId35"/>
-    <p:sldId id="285" r:id="rId36"/>
-    <p:sldId id="286" r:id="rId37"/>
-    <p:sldId id="287" r:id="rId38"/>
-    <p:sldId id="288" r:id="rId39"/>
-    <p:sldId id="289" r:id="rId40"/>
-    <p:sldId id="290" r:id="rId41"/>
-    <p:sldId id="291" r:id="rId42"/>
-    <p:sldId id="292" r:id="rId43"/>
-    <p:sldId id="293" r:id="rId44"/>
-    <p:sldId id="294" r:id="rId45"/>
-    <p:sldId id="295" r:id="rId46"/>
   </p:sldIdLst>
   <p:sldSz cx="9144000" cy="6858000" type="screen4x3"/>
   <p:notesSz cx="6858000" cy="9144000"/>
@@ -3165,7 +3143,7 @@
               </a:defRPr>
             </a:pPr>
             <a:r>
-              <a:t>Cybersecurity Information Systems Framework Failures and Their Impact on Satisfaction Scores</a:t>
+              <a:t>Cybersecurity IS Failures &amp; Patient Satisfaction</a:t>
             </a:r>
           </a:p>
         </p:txBody>
@@ -3193,14 +3171,14 @@
           <a:lstStyle/>
           <a:p>
             <a:pPr algn="ctr">
-              <a:defRPr sz="2000">
-                <a:solidFill>
-                  <a:srgbClr val="333333"/>
-                </a:solidFill>
-              </a:defRPr>
-            </a:pPr>
-            <a:r>
-              <a:t>A Case Study of a Small Community NP Clinic on the Mississippi Gulf Coast</a:t>
+              <a:defRPr sz="1800">
+                <a:solidFill>
+                  <a:srgbClr val="333333"/>
+                </a:solidFill>
+              </a:defRPr>
+            </a:pPr>
+            <a:r>
+              <a:t>A Small Community NP Clinic Case Study</a:t>
             </a:r>
           </a:p>
         </p:txBody>
@@ -3235,7 +3213,7 @@
               </a:defRPr>
             </a:pPr>
             <a:r>
-              <a:t>By Lavurn Nolen</a:t>
+              <a:t>Lavurn Nolen</a:t>
             </a:r>
           </a:p>
         </p:txBody>
@@ -3270,7 +3248,7 @@
               </a:defRPr>
             </a:pPr>
             <a:r>
-              <a:t>Doctoral Research Project | Doctor of Business Administration</a:t>
+              <a:t>Doctor of Business Administration</a:t>
             </a:r>
             <a:br/>
             <a:r>
@@ -3335,7 +3313,7 @@
               </a:defRPr>
             </a:pPr>
             <a:r>
-              <a:t>IS Governance Frameworks for Small Practices</a:t>
+              <a:t>Finding 4: Time as Currency</a:t>
             </a:r>
           </a:p>
         </p:txBody>
@@ -3399,7 +3377,7 @@
           <a:p>
             <a:pPr>
               <a:spcAft>
-                <a:spcPts val="800"/>
+                <a:spcPts val="1000"/>
               </a:spcAft>
               <a:defRPr sz="1600">
                 <a:solidFill>
@@ -3408,13 +3386,13 @@
               </a:defRPr>
             </a:pPr>
             <a:r>
-              <a:t>• NIST Cybersecurity Framework 2.0: Voluntary, risk-based; assumes resources most small orgs lack</a:t>
+              <a:t>• Clinical obligations take priority over all other work</a:t>
             </a:r>
           </a:p>
           <a:p>
             <a:pPr>
               <a:spcAft>
-                <a:spcPts val="800"/>
+                <a:spcPts val="1000"/>
               </a:spcAft>
               <a:defRPr sz="1600">
                 <a:solidFill>
@@ -3423,13 +3401,13 @@
               </a:defRPr>
             </a:pPr>
             <a:r>
-              <a:t>• HIPAA Security Rule: Mandatory; applies to small clinics exactly as to hospital systems</a:t>
+              <a:t>• No dedicated IT staff means security falls to clinicians</a:t>
             </a:r>
           </a:p>
           <a:p>
             <a:pPr>
               <a:spcAft>
-                <a:spcPts val="800"/>
+                <a:spcPts val="1000"/>
               </a:spcAft>
               <a:defRPr sz="1600">
                 <a:solidFill>
@@ -3438,13 +3416,13 @@
               </a:defRPr>
             </a:pPr>
             <a:r>
-              <a:t>• HICP: Explicitly scaled for organizations without dedicated IT staff</a:t>
+              <a:t>• Technology maintenance competes directly with patient care</a:t>
             </a:r>
           </a:p>
           <a:p>
             <a:pPr>
               <a:spcAft>
-                <a:spcPts val="800"/>
+                <a:spcPts val="1000"/>
               </a:spcAft>
               <a:defRPr sz="1600">
                 <a:solidFill>
@@ -3453,57 +3431,7 @@
               </a:defRPr>
             </a:pPr>
             <a:r>
-              <a:t>• HICP represents realistic middle path for resource-constrained organizations</a:t>
-            </a:r>
-          </a:p>
-          <a:p>
-            <a:pPr>
-              <a:spcAft>
-                <a:spcPts val="800"/>
-              </a:spcAft>
-              <a:defRPr sz="1600">
-                <a:solidFill>
-                  <a:srgbClr val="333333"/>
-                </a:solidFill>
-              </a:defRPr>
-            </a:pPr>
-            <a:r>
-              <a:t>• Framework adoption is fundamentally an economic decision as much as technical one</a:t>
-            </a:r>
-          </a:p>
-        </p:txBody>
-      </p:sp>
-      <p:sp>
-        <p:nvSpPr>
-          <p:cNvPr id="5" name="TextBox 4"/>
-          <p:cNvSpPr txBox="1"/>
-          <p:nvPr/>
-        </p:nvSpPr>
-        <p:spPr>
-          <a:xfrm>
-            <a:off x="640080" y="5943600"/>
-            <a:ext cx="8046720" cy="822960"/>
-          </a:xfrm>
-          <a:prstGeom prst="rect">
-            <a:avLst/>
-          </a:prstGeom>
-          <a:noFill/>
-        </p:spPr>
-        <p:txBody>
-          <a:bodyPr wrap="square">
-            <a:spAutoFit/>
-          </a:bodyPr>
-          <a:lstStyle/>
-          <a:p>
-            <a:pPr>
-              <a:defRPr sz="1000" i="1">
-                <a:solidFill>
-                  <a:srgbClr val="333333"/>
-                </a:solidFill>
-              </a:defRPr>
-            </a:pPr>
-            <a:r>
-              <a:t>(HHS 405(d) Task Group, 2023a; Coventry &amp; Branley, 2018)</a:t>
+              <a:t>• Organizational capacity to implement new practices severely limited</a:t>
             </a:r>
           </a:p>
         </p:txBody>
@@ -3564,7 +3492,7 @@
               </a:defRPr>
             </a:pPr>
             <a:r>
-              <a:t>Cybersecurity Failures and Patient Outcomes</a:t>
+              <a:t>Finding 5: Workarounds Mask Severity</a:t>
             </a:r>
           </a:p>
         </p:txBody>
@@ -3628,7 +3556,7 @@
           <a:p>
             <a:pPr>
               <a:spcAft>
-                <a:spcPts val="800"/>
+                <a:spcPts val="1000"/>
               </a:spcAft>
               <a:defRPr sz="1600">
                 <a:solidFill>
@@ -3637,13 +3565,13 @@
               </a:defRPr>
             </a:pPr>
             <a:r>
-              <a:t>• Choi et al. (2019): Post-breach hospitals showed longer times to care, higher mortality</a:t>
+              <a:t>• EHR outages trigger immediate shift to paper</a:t>
             </a:r>
           </a:p>
           <a:p>
             <a:pPr>
               <a:spcAft>
-                <a:spcPts val="800"/>
+                <a:spcPts val="1000"/>
               </a:spcAft>
               <a:defRPr sz="1600">
                 <a:solidFill>
@@ -3652,13 +3580,13 @@
               </a:defRPr>
             </a:pPr>
             <a:r>
-              <a:t>• Argaw et al. (2020): Hospital cyberattacks caused ambulance diversions, treatment delays</a:t>
+              <a:t>• Staff normalize workarounds as inevitable</a:t>
             </a:r>
           </a:p>
           <a:p>
             <a:pPr>
               <a:spcAft>
-                <a:spcPts val="800"/>
+                <a:spcPts val="1000"/>
               </a:spcAft>
               <a:defRPr sz="1600">
                 <a:solidFill>
@@ -3667,13 +3595,13 @@
               </a:defRPr>
             </a:pPr>
             <a:r>
-              <a:t>• Pham et al. (2024): Ransomware at one hospital increased cardiac arrests at nearby hospitals</a:t>
+              <a:t>• Workarounds consume time, create care continuity gaps</a:t>
             </a:r>
           </a:p>
           <a:p>
             <a:pPr>
               <a:spcAft>
-                <a:spcPts val="800"/>
+                <a:spcPts val="1000"/>
               </a:spcAft>
               <a:defRPr sz="1600">
                 <a:solidFill>
@@ -3682,57 +3610,7 @@
               </a:defRPr>
             </a:pPr>
             <a:r>
-              <a:t>• All evidence from hospitals; no comparable research at small outpatient clinics</a:t>
-            </a:r>
-          </a:p>
-          <a:p>
-            <a:pPr>
-              <a:spcAft>
-                <a:spcPts val="800"/>
-              </a:spcAft>
-              <a:defRPr sz="1600">
-                <a:solidFill>
-                  <a:srgbClr val="333333"/>
-                </a:solidFill>
-              </a:defRPr>
-            </a:pPr>
-            <a:r>
-              <a:t>• CG-CAHPS measures same constructs as HCAHPS: communication, responsiveness, overall care</a:t>
-            </a:r>
-          </a:p>
-        </p:txBody>
-      </p:sp>
-      <p:sp>
-        <p:nvSpPr>
-          <p:cNvPr id="5" name="TextBox 4"/>
-          <p:cNvSpPr txBox="1"/>
-          <p:nvPr/>
-        </p:nvSpPr>
-        <p:spPr>
-          <a:xfrm>
-            <a:off x="640080" y="5943600"/>
-            <a:ext cx="8046720" cy="822960"/>
-          </a:xfrm>
-          <a:prstGeom prst="rect">
-            <a:avLst/>
-          </a:prstGeom>
-          <a:noFill/>
-        </p:spPr>
-        <p:txBody>
-          <a:bodyPr wrap="square">
-            <a:spAutoFit/>
-          </a:bodyPr>
-          <a:lstStyle/>
-          <a:p>
-            <a:pPr>
-              <a:defRPr sz="1000" i="1">
-                <a:solidFill>
-                  <a:srgbClr val="333333"/>
-                </a:solidFill>
-              </a:defRPr>
-            </a:pPr>
-            <a:r>
-              <a:t>(Choi et al., 2019; Argaw et al., 2020; Pham et al., 2024)</a:t>
+              <a:t>• Informal detection of incidents (systems down, users call)</a:t>
             </a:r>
           </a:p>
         </p:txBody>
@@ -3793,7 +3671,7 @@
               </a:defRPr>
             </a:pPr>
             <a:r>
-              <a:t>Human and Organizational Factors</a:t>
+              <a:t>Connection to Patient Experience</a:t>
             </a:r>
           </a:p>
         </p:txBody>
@@ -3857,7 +3735,7 @@
           <a:p>
             <a:pPr>
               <a:spcAft>
-                <a:spcPts val="800"/>
+                <a:spcPts val="1000"/>
               </a:spcAft>
               <a:defRPr sz="1600">
                 <a:solidFill>
@@ -3866,13 +3744,13 @@
               </a:defRPr>
             </a:pPr>
             <a:r>
-              <a:t>• Employee behavior and phishing are most consistent vulnerabilities (Nifakos et al., 2021)</a:t>
+              <a:t>• Technology disruptions create immediate workflow barriers</a:t>
             </a:r>
           </a:p>
           <a:p>
             <a:pPr>
               <a:spcAft>
-                <a:spcPts val="800"/>
+                <a:spcPts val="1000"/>
               </a:spcAft>
               <a:defRPr sz="1600">
                 <a:solidFill>
@@ -3881,13 +3759,13 @@
               </a:defRPr>
             </a:pPr>
             <a:r>
-              <a:t>• Organizational culture predicts security behavior more than formal training</a:t>
+              <a:t>• Staff report observable patient frustration during outages</a:t>
             </a:r>
           </a:p>
           <a:p>
             <a:pPr>
               <a:spcAft>
-                <a:spcPts val="800"/>
+                <a:spcPts val="1000"/>
               </a:spcAft>
               <a:defRPr sz="1600">
                 <a:solidFill>
@@ -3896,13 +3774,13 @@
               </a:defRPr>
             </a:pPr>
             <a:r>
-              <a:t>• Clinicians rank time and resource constraints as top barrier to implementation (Alanazi, 2023)</a:t>
+              <a:t>• Increased wait times, scheduling delays, rescheduled visits</a:t>
             </a:r>
           </a:p>
           <a:p>
             <a:pPr>
               <a:spcAft>
-                <a:spcPts val="800"/>
+                <a:spcPts val="1000"/>
               </a:spcAft>
               <a:defRPr sz="1600">
                 <a:solidFill>
@@ -3911,57 +3789,7 @@
               </a:defRPr>
             </a:pPr>
             <a:r>
-              <a:t>• Resistance reflects realistic accounting of costs, not rejection of security value</a:t>
-            </a:r>
-          </a:p>
-          <a:p>
-            <a:pPr>
-              <a:spcAft>
-                <a:spcPts val="800"/>
-              </a:spcAft>
-              <a:defRPr sz="1600">
-                <a:solidFill>
-                  <a:srgbClr val="333333"/>
-                </a:solidFill>
-              </a:defRPr>
-            </a:pPr>
-            <a:r>
-              <a:t>• At small clinics, human factors carry even more weight due to minimal formal structure</a:t>
-            </a:r>
-          </a:p>
-        </p:txBody>
-      </p:sp>
-      <p:sp>
-        <p:nvSpPr>
-          <p:cNvPr id="5" name="TextBox 4"/>
-          <p:cNvSpPr txBox="1"/>
-          <p:nvPr/>
-        </p:nvSpPr>
-        <p:spPr>
-          <a:xfrm>
-            <a:off x="640080" y="5943600"/>
-            <a:ext cx="8046720" cy="822960"/>
-          </a:xfrm>
-          <a:prstGeom prst="rect">
-            <a:avLst/>
-          </a:prstGeom>
-          <a:noFill/>
-        </p:spPr>
-        <p:txBody>
-          <a:bodyPr wrap="square">
-            <a:spAutoFit/>
-          </a:bodyPr>
-          <a:lstStyle/>
-          <a:p>
-            <a:pPr>
-              <a:defRPr sz="1000" i="1">
-                <a:solidFill>
-                  <a:srgbClr val="333333"/>
-                </a:solidFill>
-              </a:defRPr>
-            </a:pPr>
-            <a:r>
-              <a:t>(Nifakos et al., 2021; Alanazi, 2023)</a:t>
+              <a:t>• Patient-facing impact on communication, responsiveness (CG-CAHPS domains)</a:t>
             </a:r>
           </a:p>
         </p:txBody>
@@ -4022,7 +3850,7 @@
               </a:defRPr>
             </a:pPr>
             <a:r>
-              <a:t>Conceptual Research Framework</a:t>
+              <a:t>How Findings Connect to Research</a:t>
             </a:r>
           </a:p>
         </p:txBody>
@@ -4086,7 +3914,7 @@
           <a:p>
             <a:pPr>
               <a:spcAft>
-                <a:spcPts val="800"/>
+                <a:spcPts val="1000"/>
               </a:spcAft>
               <a:defRPr sz="1600">
                 <a:solidFill>
@@ -4095,13 +3923,13 @@
               </a:defRPr>
             </a:pPr>
             <a:r>
-              <a:t>• Inputs: IS Governance Variables (NIST adoption, HIPAA compliance, HICP tier)</a:t>
+              <a:t>• Supports hospital evidence: Governance gaps → operational disruption</a:t>
             </a:r>
           </a:p>
           <a:p>
             <a:pPr>
               <a:spcAft>
-                <a:spcPts val="800"/>
+                <a:spcPts val="1000"/>
               </a:spcAft>
               <a:defRPr sz="1600">
                 <a:solidFill>
@@ -4110,13 +3938,13 @@
               </a:defRPr>
             </a:pPr>
             <a:r>
-              <a:t>• Actors: Technology staff, Clinical staff, Practice owner, Patients</a:t>
+              <a:t>• Time/resource constraints documented at small practice scale (Alanazi, 2023)</a:t>
             </a:r>
           </a:p>
           <a:p>
             <a:pPr>
               <a:spcAft>
-                <a:spcPts val="800"/>
+                <a:spcPts val="1000"/>
               </a:spcAft>
               <a:defRPr sz="1600">
                 <a:solidFill>
@@ -4125,13 +3953,13 @@
               </a:defRPr>
             </a:pPr>
             <a:r>
-              <a:t>• Mediating Processes: Technology incident → EHR disruption → Communication breakdown → Delayed care</a:t>
+              <a:t>• Organizational culture shapes outcomes more than technical controls (Nifakos et al., 2021)</a:t>
             </a:r>
           </a:p>
           <a:p>
             <a:pPr>
               <a:spcAft>
-                <a:spcPts val="800"/>
+                <a:spcPts val="1000"/>
               </a:spcAft>
               <a:defRPr sz="1600">
                 <a:solidFill>
@@ -4140,22 +3968,42 @@
               </a:defRPr>
             </a:pPr>
             <a:r>
-              <a:t>• Outputs: CG-CAHPS-aligned satisfaction (communication, responsiveness, overall rating)</a:t>
-            </a:r>
-          </a:p>
-          <a:p>
-            <a:pPr>
-              <a:spcAft>
-                <a:spcPts val="800"/>
-              </a:spcAft>
-              <a:defRPr sz="1600">
-                <a:solidFill>
-                  <a:srgbClr val="333333"/>
-                </a:solidFill>
-              </a:defRPr>
-            </a:pPr>
-            <a:r>
-              <a:t>• Theoretical Lenses: IS Governance, Organizational Resilience, Service Quality theories</a:t>
+              <a:t>• Hospital-to-clinic pathway holds even in resource-constrained settings</a:t>
+            </a:r>
+          </a:p>
+        </p:txBody>
+      </p:sp>
+      <p:sp>
+        <p:nvSpPr>
+          <p:cNvPr id="5" name="TextBox 4"/>
+          <p:cNvSpPr txBox="1"/>
+          <p:nvPr/>
+        </p:nvSpPr>
+        <p:spPr>
+          <a:xfrm>
+            <a:off x="640080" y="5943600"/>
+            <a:ext cx="8046720" cy="822960"/>
+          </a:xfrm>
+          <a:prstGeom prst="rect">
+            <a:avLst/>
+          </a:prstGeom>
+          <a:noFill/>
+        </p:spPr>
+        <p:txBody>
+          <a:bodyPr wrap="square">
+            <a:spAutoFit/>
+          </a:bodyPr>
+          <a:lstStyle/>
+          <a:p>
+            <a:pPr>
+              <a:defRPr sz="1000" i="1">
+                <a:solidFill>
+                  <a:srgbClr val="333333"/>
+                </a:solidFill>
+              </a:defRPr>
+            </a:pPr>
+            <a:r>
+              <a:t>(Alanazi, 2023; Nifakos et al., 2021)</a:t>
             </a:r>
           </a:p>
         </p:txBody>
@@ -4216,7 +4064,7 @@
               </a:defRPr>
             </a:pPr>
             <a:r>
-              <a:t>Role of the Researcher</a:t>
+              <a:t>Implications for Small Practices</a:t>
             </a:r>
           </a:p>
         </p:txBody>
@@ -4280,7 +4128,7 @@
           <a:p>
             <a:pPr>
               <a:spcAft>
-                <a:spcPts val="800"/>
+                <a:spcPts val="1000"/>
               </a:spcAft>
               <a:defRPr sz="1600">
                 <a:solidFill>
@@ -4289,13 +4137,13 @@
               </a:defRPr>
             </a:pPr>
             <a:r>
-              <a:t>• 10+ years in cybersecurity and security operations</a:t>
+              <a:t>• HICP provides realistic framework; full NIST adoption not feasible</a:t>
             </a:r>
           </a:p>
           <a:p>
             <a:pPr>
               <a:spcAft>
-                <a:spcPts val="800"/>
+                <a:spcPts val="1000"/>
               </a:spcAft>
               <a:defRPr sz="1600">
                 <a:solidFill>
@@ -4304,13 +4152,13 @@
               </a:defRPr>
             </a:pPr>
             <a:r>
-              <a:t>• Strength: Recognize subtle gaps in security practice</a:t>
+              <a:t>• Security awareness must start with practice owner and all staff</a:t>
             </a:r>
           </a:p>
           <a:p>
             <a:pPr>
               <a:spcAft>
-                <a:spcPts val="800"/>
+                <a:spcPts val="1000"/>
               </a:spcAft>
               <a:defRPr sz="1600">
                 <a:solidFill>
@@ -4319,13 +4167,13 @@
               </a:defRPr>
             </a:pPr>
             <a:r>
-              <a:t>• Risk: May see gaps everywhere, unconsciously favor confirming evidence</a:t>
+              <a:t>• Incident response planning should fit small-team workflows</a:t>
             </a:r>
           </a:p>
           <a:p>
             <a:pPr>
               <a:spcAft>
-                <a:spcPts val="800"/>
+                <a:spcPts val="1000"/>
               </a:spcAft>
               <a:defRPr sz="1600">
                 <a:solidFill>
@@ -4334,22 +4182,7 @@
               </a:defRPr>
             </a:pPr>
             <a:r>
-              <a:t>• Safeguards: Reflexive bracketing, reflexive journal, member checking, audit trail</a:t>
-            </a:r>
-          </a:p>
-          <a:p>
-            <a:pPr>
-              <a:spcAft>
-                <a:spcPts val="800"/>
-              </a:spcAft>
-              <a:defRPr sz="1600">
-                <a:solidFill>
-                  <a:srgbClr val="333333"/>
-                </a:solidFill>
-              </a:defRPr>
-            </a:pPr>
-            <a:r>
-              <a:t>• No employment or financial relationship with NP Clinic</a:t>
+              <a:t>• Vendor relationships must include explicit security expectations</a:t>
             </a:r>
           </a:p>
         </p:txBody>
@@ -4410,7 +4243,7 @@
               </a:defRPr>
             </a:pPr>
             <a:r>
-              <a:t>Population and Sampling</a:t>
+              <a:t>Recommendations for NP Clinic</a:t>
             </a:r>
           </a:p>
         </p:txBody>
@@ -4474,7 +4307,7 @@
           <a:p>
             <a:pPr>
               <a:spcAft>
-                <a:spcPts val="800"/>
+                <a:spcPts val="1000"/>
               </a:spcAft>
               <a:defRPr sz="1600">
                 <a:solidFill>
@@ -4483,13 +4316,13 @@
               </a:defRPr>
             </a:pPr>
             <a:r>
-              <a:t>• Track A: Staff with IT or cybersecurity responsibility (formal or informal)</a:t>
+              <a:t>• Immediate: Document current practices and formalize incident response</a:t>
             </a:r>
           </a:p>
           <a:p>
             <a:pPr>
               <a:spcAft>
-                <a:spcPts val="800"/>
+                <a:spcPts val="1000"/>
               </a:spcAft>
               <a:defRPr sz="1600">
                 <a:solidFill>
@@ -4498,13 +4331,13 @@
               </a:defRPr>
             </a:pPr>
             <a:r>
-              <a:t>• Track B: Clinical staff providing direct patient care and using EHR daily</a:t>
+              <a:t>• Near-term: Adopt HICP small-organization tier as baseline</a:t>
             </a:r>
           </a:p>
           <a:p>
             <a:pPr>
               <a:spcAft>
-                <a:spcPts val="800"/>
+                <a:spcPts val="1000"/>
               </a:spcAft>
               <a:defRPr sz="1600">
                 <a:solidFill>
@@ -4513,13 +4346,13 @@
               </a:defRPr>
             </a:pPr>
             <a:r>
-              <a:t>• Target Sample: 8–10 participants from estimated 12–16 eligible staff</a:t>
+              <a:t>• Ongoing: Integrate security awareness into staff training</a:t>
             </a:r>
           </a:p>
           <a:p>
             <a:pPr>
               <a:spcAft>
-                <a:spcPts val="800"/>
+                <a:spcPts val="1000"/>
               </a:spcAft>
               <a:defRPr sz="1600">
                 <a:solidFill>
@@ -4528,57 +4361,7 @@
               </a:defRPr>
             </a:pPr>
             <a:r>
-              <a:t>• Method: Purposive, criterion-based sampling for information-rich participants</a:t>
-            </a:r>
-          </a:p>
-          <a:p>
-            <a:pPr>
-              <a:spcAft>
-                <a:spcPts val="800"/>
-              </a:spcAft>
-              <a:defRPr sz="1600">
-                <a:solidFill>
-                  <a:srgbClr val="333333"/>
-                </a:solidFill>
-              </a:defRPr>
-            </a:pPr>
-            <a:r>
-              <a:t>• Inclusion: Age 18+, 6+ months tenure, qualifying role, English proficiency, willing consent</a:t>
-            </a:r>
-          </a:p>
-        </p:txBody>
-      </p:sp>
-      <p:sp>
-        <p:nvSpPr>
-          <p:cNvPr id="5" name="TextBox 4"/>
-          <p:cNvSpPr txBox="1"/>
-          <p:nvPr/>
-        </p:nvSpPr>
-        <p:spPr>
-          <a:xfrm>
-            <a:off x="640080" y="5943600"/>
-            <a:ext cx="8046720" cy="822960"/>
-          </a:xfrm>
-          <a:prstGeom prst="rect">
-            <a:avLst/>
-          </a:prstGeom>
-          <a:noFill/>
-        </p:spPr>
-        <p:txBody>
-          <a:bodyPr wrap="square">
-            <a:spAutoFit/>
-          </a:bodyPr>
-          <a:lstStyle/>
-          <a:p>
-            <a:pPr>
-              <a:defRPr sz="1000" i="1">
-                <a:solidFill>
-                  <a:srgbClr val="333333"/>
-                </a:solidFill>
-              </a:defRPr>
-            </a:pPr>
-            <a:r>
-              <a:t>(Ahmad &amp; Wilkins, 2025; Campbell et al., 2020)</a:t>
+              <a:t>• Strategic: Evaluate vendors with explicit security requirements</a:t>
             </a:r>
           </a:p>
         </p:txBody>
@@ -4639,7 +4422,7 @@
               </a:defRPr>
             </a:pPr>
             <a:r>
-              <a:t>Data Collection Methods</a:t>
+              <a:t>Implications for Research &amp; Policy</a:t>
             </a:r>
           </a:p>
         </p:txBody>
@@ -4703,7 +4486,7 @@
           <a:p>
             <a:pPr>
               <a:spcAft>
-                <a:spcPts val="800"/>
+                <a:spcPts val="1000"/>
               </a:spcAft>
               <a:defRPr sz="1600">
                 <a:solidFill>
@@ -4712,13 +4495,13 @@
               </a:defRPr>
             </a:pPr>
             <a:r>
-              <a:t>• Semi-structured interviews: sole source per site authorization</a:t>
+              <a:t>Research: Multi-site studies of small practices, longitudinal tracking of governance improvements</a:t>
             </a:r>
           </a:p>
           <a:p>
             <a:pPr>
               <a:spcAft>
-                <a:spcPts val="800"/>
+                <a:spcPts val="1000"/>
               </a:spcAft>
               <a:defRPr sz="1600">
                 <a:solidFill>
@@ -4726,14 +4509,11 @@
                 </a:solidFill>
               </a:defRPr>
             </a:pPr>
-            <a:r>
-              <a:t>• Track-specific protocols (Track A technology, Track B clinical perspective)</a:t>
-            </a:r>
           </a:p>
           <a:p>
             <a:pPr>
               <a:spcAft>
-                <a:spcPts val="800"/>
+                <a:spcPts val="1000"/>
               </a:spcAft>
               <a:defRPr sz="1600">
                 <a:solidFill>
@@ -4742,13 +4522,13 @@
               </a:defRPr>
             </a:pPr>
             <a:r>
-              <a:t>• Format: 30–45 minute interviews, private space or secured videoconference</a:t>
+              <a:t>Policy: Regulators must acknowledge capacity limitations; scaled technical assistance needed</a:t>
             </a:r>
           </a:p>
           <a:p>
             <a:pPr>
               <a:spcAft>
-                <a:spcPts val="800"/>
+                <a:spcPts val="1000"/>
               </a:spcAft>
               <a:defRPr sz="1600">
                 <a:solidFill>
@@ -4756,14 +4536,11 @@
                 </a:solidFill>
               </a:defRPr>
             </a:pPr>
-            <a:r>
-              <a:t>• Recording: Audio recorded and transcribed verbatim</a:t>
-            </a:r>
           </a:p>
           <a:p>
             <a:pPr>
               <a:spcAft>
-                <a:spcPts val="800"/>
+                <a:spcPts val="1000"/>
               </a:spcAft>
               <a:defRPr sz="1600">
                 <a:solidFill>
@@ -4772,22 +4549,7 @@
               </a:defRPr>
             </a:pPr>
             <a:r>
-              <a:t>• Member Checking: Summaries returned to participants for verification</a:t>
-            </a:r>
-          </a:p>
-          <a:p>
-            <a:pPr>
-              <a:spcAft>
-                <a:spcPts val="800"/>
-              </a:spcAft>
-              <a:defRPr sz="1600">
-                <a:solidFill>
-                  <a:srgbClr val="333333"/>
-                </a:solidFill>
-              </a:defRPr>
-            </a:pPr>
-            <a:r>
-              <a:t>• No clinic records, patient data, or protected health information accessed</a:t>
+              <a:t>Practice: Hospital-based evidence extends to outpatient settings with contextual modifications</a:t>
             </a:r>
           </a:p>
         </p:txBody>
@@ -4848,7 +4610,7 @@
               </a:defRPr>
             </a:pPr>
             <a:r>
-              <a:t>Data Analysis Plan</a:t>
+              <a:t>Summary</a:t>
             </a:r>
           </a:p>
         </p:txBody>
@@ -4912,7 +4674,7 @@
           <a:p>
             <a:pPr>
               <a:spcAft>
-                <a:spcPts val="800"/>
+                <a:spcPts val="1000"/>
               </a:spcAft>
               <a:defRPr sz="1600">
                 <a:solidFill>
@@ -4921,13 +4683,13 @@
               </a:defRPr>
             </a:pPr>
             <a:r>
-              <a:t>• Method: Reflexive thematic analysis (Braun &amp; Clarke, 2021)</a:t>
+              <a:t>• IS governance failures at NP Clinic are real and measurable</a:t>
             </a:r>
           </a:p>
           <a:p>
             <a:pPr>
               <a:spcAft>
-                <a:spcPts val="800"/>
+                <a:spcPts val="1000"/>
               </a:spcAft>
               <a:defRPr sz="1600">
                 <a:solidFill>
@@ -4936,13 +4698,13 @@
               </a:defRPr>
             </a:pPr>
             <a:r>
-              <a:t>• Process: Familiarization → open coding → grouping → theme development</a:t>
+              <a:t>• Governance gaps translate into operational disruptions affecting workflow</a:t>
             </a:r>
           </a:p>
           <a:p>
             <a:pPr>
               <a:spcAft>
-                <a:spcPts val="800"/>
+                <a:spcPts val="1000"/>
               </a:spcAft>
               <a:defRPr sz="1600">
                 <a:solidFill>
@@ -4951,13 +4713,13 @@
               </a:defRPr>
             </a:pPr>
             <a:r>
-              <a:t>• Both tracks analyzed together to identify recurring themes</a:t>
+              <a:t>• Disruptions manifest as care delays, communication challenges, patient frustration</a:t>
             </a:r>
           </a:p>
           <a:p>
             <a:pPr>
               <a:spcAft>
-                <a:spcPts val="800"/>
+                <a:spcPts val="1000"/>
               </a:spcAft>
               <a:defRPr sz="1600">
                 <a:solidFill>
@@ -4966,72 +4728,7 @@
               </a:defRPr>
             </a:pPr>
             <a:r>
-              <a:t>• Saturation tracking: Continued until new interviews stopped adding themes</a:t>
-            </a:r>
-          </a:p>
-          <a:p>
-            <a:pPr>
-              <a:spcAft>
-                <a:spcPts val="800"/>
-              </a:spcAft>
-              <a:defRPr sz="1600">
-                <a:solidFill>
-                  <a:srgbClr val="333333"/>
-                </a:solidFill>
-              </a:defRPr>
-            </a:pPr>
-            <a:r>
-              <a:t>• Triangulation: Data-source triangulation across two participant tracks</a:t>
-            </a:r>
-          </a:p>
-          <a:p>
-            <a:pPr>
-              <a:spcAft>
-                <a:spcPts val="800"/>
-              </a:spcAft>
-              <a:defRPr sz="1600">
-                <a:solidFill>
-                  <a:srgbClr val="333333"/>
-                </a:solidFill>
-              </a:defRPr>
-            </a:pPr>
-            <a:r>
-              <a:t>• Software: Qualitative data analysis software maintains audit trail</a:t>
-            </a:r>
-          </a:p>
-        </p:txBody>
-      </p:sp>
-      <p:sp>
-        <p:nvSpPr>
-          <p:cNvPr id="5" name="TextBox 4"/>
-          <p:cNvSpPr txBox="1"/>
-          <p:nvPr/>
-        </p:nvSpPr>
-        <p:spPr>
-          <a:xfrm>
-            <a:off x="640080" y="5943600"/>
-            <a:ext cx="8046720" cy="822960"/>
-          </a:xfrm>
-          <a:prstGeom prst="rect">
-            <a:avLst/>
-          </a:prstGeom>
-          <a:noFill/>
-        </p:spPr>
-        <p:txBody>
-          <a:bodyPr wrap="square">
-            <a:spAutoFit/>
-          </a:bodyPr>
-          <a:lstStyle/>
-          <a:p>
-            <a:pPr>
-              <a:defRPr sz="1000" i="1">
-                <a:solidFill>
-                  <a:srgbClr val="333333"/>
-                </a:solidFill>
-              </a:defRPr>
-            </a:pPr>
-            <a:r>
-              <a:t>(Braun &amp; Clarke, 2021)</a:t>
+              <a:t>• Recommendations must scale to resource constraints while meeting regulatory obligations</a:t>
             </a:r>
           </a:p>
         </p:txBody>
@@ -5050,7 +4747,7 @@
     <p:bg>
       <p:bgPr>
         <a:solidFill>
-          <a:srgbClr val="FFFFFF"/>
+          <a:srgbClr val="1B3A6B"/>
         </a:solidFill>
         <a:effectLst/>
       </p:bgPr>
@@ -5070,8 +4767,8 @@
         </p:nvSpPr>
         <p:spPr>
           <a:xfrm>
-            <a:off x="457200" y="365760"/>
-            <a:ext cx="8229600" cy="548640"/>
+            <a:off x="457200" y="2286000"/>
+            <a:ext cx="8229600" cy="1097280"/>
           </a:xfrm>
           <a:prstGeom prst="rect">
             <a:avLst/>
@@ -5079,69 +4776,34 @@
           <a:noFill/>
         </p:spPr>
         <p:txBody>
-          <a:bodyPr wrap="square">
+          <a:bodyPr wrap="none">
             <a:spAutoFit/>
           </a:bodyPr>
           <a:lstStyle/>
           <a:p>
-            <a:pPr>
-              <a:defRPr sz="2800" b="1">
-                <a:solidFill>
-                  <a:srgbClr val="1B3A6B"/>
-                </a:solidFill>
-              </a:defRPr>
-            </a:pPr>
-            <a:r>
-              <a:t>Key Assumptions</a:t>
-            </a:r>
-          </a:p>
-        </p:txBody>
-      </p:sp>
-      <p:cxnSp>
-        <p:nvCxnSpPr>
-          <p:cNvPr id="3" name="Connector 2"/>
-          <p:cNvCxnSpPr/>
-          <p:nvPr/>
-        </p:nvCxnSpPr>
-        <p:spPr>
-          <a:xfrm>
-            <a:off x="457200" y="1005840"/>
-            <a:ext cx="8229600" cy="0"/>
-          </a:xfrm>
-          <a:prstGeom prst="line">
-            <a:avLst/>
-          </a:prstGeom>
-          <a:ln w="25400">
-            <a:solidFill>
-              <a:srgbClr val="4A90E2"/>
-            </a:solidFill>
-          </a:ln>
-        </p:spPr>
-        <p:style>
-          <a:lnRef idx="2">
-            <a:schemeClr val="accent1"/>
-          </a:lnRef>
-          <a:fillRef idx="0">
-            <a:schemeClr val="accent1"/>
-          </a:fillRef>
-          <a:effectRef idx="1">
-            <a:schemeClr val="accent1"/>
-          </a:effectRef>
-          <a:fontRef idx="minor">
-            <a:schemeClr val="tx1"/>
-          </a:fontRef>
-        </p:style>
-      </p:cxnSp>
-      <p:sp>
-        <p:nvSpPr>
-          <p:cNvPr id="4" name="TextBox 3"/>
+            <a:pPr algn="ctr">
+              <a:defRPr sz="4800" b="1">
+                <a:solidFill>
+                  <a:srgbClr val="FFFFFF"/>
+                </a:solidFill>
+              </a:defRPr>
+            </a:pPr>
+            <a:r>
+              <a:t>Questions?</a:t>
+            </a:r>
+          </a:p>
+        </p:txBody>
+      </p:sp>
+      <p:sp>
+        <p:nvSpPr>
+          <p:cNvPr id="3" name="TextBox 2"/>
           <p:cNvSpPr txBox="1"/>
           <p:nvPr/>
         </p:nvSpPr>
         <p:spPr>
           <a:xfrm>
-            <a:off x="640080" y="1234440"/>
-            <a:ext cx="8046720" cy="4754880"/>
+            <a:off x="457200" y="3657600"/>
+            <a:ext cx="8229600" cy="1828800"/>
           </a:xfrm>
           <a:prstGeom prst="rect">
             <a:avLst/>
@@ -5154,307 +4816,23 @@
           </a:bodyPr>
           <a:lstStyle/>
           <a:p>
-            <a:pPr>
-              <a:spcAft>
-                <a:spcPts val="800"/>
-              </a:spcAft>
-              <a:defRPr sz="1600">
-                <a:solidFill>
-                  <a:srgbClr val="333333"/>
-                </a:solidFill>
-              </a:defRPr>
-            </a:pPr>
-            <a:r>
-              <a:t>• Participants answer honestly about practices and patient responses</a:t>
-            </a:r>
-          </a:p>
-          <a:p>
-            <a:pPr>
-              <a:spcAft>
-                <a:spcPts val="800"/>
-              </a:spcAft>
-              <a:defRPr sz="1600">
-                <a:solidFill>
-                  <a:srgbClr val="333333"/>
-                </a:solidFill>
-              </a:defRPr>
-            </a:pPr>
-            <a:r>
-              <a:t>• Interview data alone sufficient without clinic records</a:t>
-            </a:r>
-          </a:p>
-          <a:p>
-            <a:pPr>
-              <a:spcAft>
-                <a:spcPts val="800"/>
-              </a:spcAft>
-              <a:defRPr sz="1600">
-                <a:solidFill>
-                  <a:srgbClr val="333333"/>
-                </a:solidFill>
-              </a:defRPr>
-            </a:pPr>
-            <a:r>
-              <a:t>• Purposive sampling reaches information-rich participants</a:t>
-            </a:r>
-          </a:p>
-          <a:p>
-            <a:pPr>
-              <a:spcAft>
-                <a:spcPts val="800"/>
-              </a:spcAft>
-              <a:defRPr sz="1600">
-                <a:solidFill>
-                  <a:srgbClr val="333333"/>
-                </a:solidFill>
-              </a:defRPr>
-            </a:pPr>
-            <a:r>
-              <a:t>• CG-CAHPS-aligned data relates meaningfully to technology conditions</a:t>
-            </a:r>
-          </a:p>
-          <a:p>
-            <a:pPr>
-              <a:spcAft>
-                <a:spcPts val="800"/>
-              </a:spcAft>
-              <a:defRPr sz="1600">
-                <a:solidFill>
-                  <a:srgbClr val="333333"/>
-                </a:solidFill>
-              </a:defRPr>
-            </a:pPr>
-            <a:r>
-              <a:t>• Mitigations: Pseudonymous coding, identity separation, cross-track comparison, reflexivity</a:t>
-            </a:r>
-          </a:p>
-        </p:txBody>
-      </p:sp>
-    </p:spTree>
-  </p:cSld>
-  <p:clrMapOvr>
-    <a:masterClrMapping/>
-  </p:clrMapOvr>
-</p:sld>
-</file>
-
-<file path=ppt/slides/slide19.xml><?xml version="1.0" encoding="utf-8"?>
-<p:sld xmlns:a="http://schemas.openxmlformats.org/drawingml/2006/main" xmlns:p="http://schemas.openxmlformats.org/presentationml/2006/main" xmlns:r="http://schemas.openxmlformats.org/officeDocument/2006/relationships">
-  <p:cSld>
-    <p:bg>
-      <p:bgPr>
-        <a:solidFill>
-          <a:srgbClr val="FFFFFF"/>
-        </a:solidFill>
-        <a:effectLst/>
-      </p:bgPr>
-    </p:bg>
-    <p:spTree>
-      <p:nvGrpSpPr>
-        <p:cNvPr id="1" name=""/>
-        <p:cNvGrpSpPr/>
-        <p:nvPr/>
-      </p:nvGrpSpPr>
-      <p:grpSpPr/>
-      <p:sp>
-        <p:nvSpPr>
-          <p:cNvPr id="2" name="TextBox 1"/>
-          <p:cNvSpPr txBox="1"/>
-          <p:nvPr/>
-        </p:nvSpPr>
-        <p:spPr>
-          <a:xfrm>
-            <a:off x="457200" y="365760"/>
-            <a:ext cx="8229600" cy="548640"/>
-          </a:xfrm>
-          <a:prstGeom prst="rect">
-            <a:avLst/>
-          </a:prstGeom>
-          <a:noFill/>
-        </p:spPr>
-        <p:txBody>
-          <a:bodyPr wrap="square">
-            <a:spAutoFit/>
-          </a:bodyPr>
-          <a:lstStyle/>
-          <a:p>
-            <a:pPr>
-              <a:defRPr sz="2800" b="1">
-                <a:solidFill>
-                  <a:srgbClr val="1B3A6B"/>
-                </a:solidFill>
-              </a:defRPr>
-            </a:pPr>
-            <a:r>
-              <a:t>Study Limitations</a:t>
-            </a:r>
-          </a:p>
-        </p:txBody>
-      </p:sp>
-      <p:cxnSp>
-        <p:nvCxnSpPr>
-          <p:cNvPr id="3" name="Connector 2"/>
-          <p:cNvCxnSpPr/>
-          <p:nvPr/>
-        </p:nvCxnSpPr>
-        <p:spPr>
-          <a:xfrm>
-            <a:off x="457200" y="1005840"/>
-            <a:ext cx="8229600" cy="0"/>
-          </a:xfrm>
-          <a:prstGeom prst="line">
-            <a:avLst/>
-          </a:prstGeom>
-          <a:ln w="25400">
-            <a:solidFill>
-              <a:srgbClr val="4A90E2"/>
-            </a:solidFill>
-          </a:ln>
-        </p:spPr>
-        <p:style>
-          <a:lnRef idx="2">
-            <a:schemeClr val="accent1"/>
-          </a:lnRef>
-          <a:fillRef idx="0">
-            <a:schemeClr val="accent1"/>
-          </a:fillRef>
-          <a:effectRef idx="1">
-            <a:schemeClr val="accent1"/>
-          </a:effectRef>
-          <a:fontRef idx="minor">
-            <a:schemeClr val="tx1"/>
-          </a:fontRef>
-        </p:style>
-      </p:cxnSp>
-      <p:sp>
-        <p:nvSpPr>
-          <p:cNvPr id="4" name="TextBox 3"/>
-          <p:cNvSpPr txBox="1"/>
-          <p:nvPr/>
-        </p:nvSpPr>
-        <p:spPr>
-          <a:xfrm>
-            <a:off x="640080" y="1234440"/>
-            <a:ext cx="8046720" cy="4754880"/>
-          </a:xfrm>
-          <a:prstGeom prst="rect">
-            <a:avLst/>
-          </a:prstGeom>
-          <a:noFill/>
-        </p:spPr>
-        <p:txBody>
-          <a:bodyPr wrap="square">
-            <a:spAutoFit/>
-          </a:bodyPr>
-          <a:lstStyle/>
-          <a:p>
-            <a:pPr>
-              <a:spcAft>
-                <a:spcPts val="800"/>
-              </a:spcAft>
-              <a:defRPr sz="1600">
-                <a:solidFill>
-                  <a:srgbClr val="333333"/>
-                </a:solidFill>
-              </a:defRPr>
-            </a:pPr>
-            <a:r>
-              <a:t>• Single case with purposive sample limits statistical generalization</a:t>
-            </a:r>
-          </a:p>
-          <a:p>
-            <a:pPr>
-              <a:spcAft>
-                <a:spcPts val="800"/>
-              </a:spcAft>
-              <a:defRPr sz="1600">
-                <a:solidFill>
-                  <a:srgbClr val="333333"/>
-                </a:solidFill>
-              </a:defRPr>
-            </a:pPr>
-            <a:r>
-              <a:t>• Researcher is primary instrument; cybersecurity background shapes what stands out</a:t>
-            </a:r>
-          </a:p>
-          <a:p>
-            <a:pPr>
-              <a:spcAft>
-                <a:spcPts val="800"/>
-              </a:spcAft>
-              <a:defRPr sz="1600">
-                <a:solidFill>
-                  <a:srgbClr val="333333"/>
-                </a:solidFill>
-              </a:defRPr>
-            </a:pPr>
-            <a:r>
-              <a:t>• Relies entirely on self-report; member checking helps but doesn't certify accuracy</a:t>
-            </a:r>
-          </a:p>
-          <a:p>
-            <a:pPr>
-              <a:spcAft>
-                <a:spcPts val="800"/>
-              </a:spcAft>
-              <a:defRPr sz="1600">
-                <a:solidFill>
-                  <a:srgbClr val="333333"/>
-                </a:solidFill>
-              </a:defRPr>
-            </a:pPr>
-            <a:r>
-              <a:t>• Track A limited to 2 participants by clinic staffing</a:t>
-            </a:r>
-          </a:p>
-          <a:p>
-            <a:pPr>
-              <a:spcAft>
-                <a:spcPts val="800"/>
-              </a:spcAft>
-              <a:defRPr sz="1600">
-                <a:solidFill>
-                  <a:srgbClr val="333333"/>
-                </a:solidFill>
-              </a:defRPr>
-            </a:pPr>
-            <a:r>
-              <a:t>• Mitigations: Thick description, audit trail, second coder, reflexive memos</a:t>
-            </a:r>
-          </a:p>
-        </p:txBody>
-      </p:sp>
-      <p:sp>
-        <p:nvSpPr>
-          <p:cNvPr id="5" name="TextBox 4"/>
-          <p:cNvSpPr txBox="1"/>
-          <p:nvPr/>
-        </p:nvSpPr>
-        <p:spPr>
-          <a:xfrm>
-            <a:off x="640080" y="5943600"/>
-            <a:ext cx="8046720" cy="822960"/>
-          </a:xfrm>
-          <a:prstGeom prst="rect">
-            <a:avLst/>
-          </a:prstGeom>
-          <a:noFill/>
-        </p:spPr>
-        <p:txBody>
-          <a:bodyPr wrap="square">
-            <a:spAutoFit/>
-          </a:bodyPr>
-          <a:lstStyle/>
-          <a:p>
-            <a:pPr>
-              <a:defRPr sz="1000" i="1">
-                <a:solidFill>
-                  <a:srgbClr val="333333"/>
-                </a:solidFill>
-              </a:defRPr>
-            </a:pPr>
-            <a:r>
-              <a:t>(Olmos-Vega et al., 2023)</a:t>
+            <a:pPr algn="ctr">
+              <a:defRPr sz="1600">
+                <a:solidFill>
+                  <a:srgbClr val="FFFFFF"/>
+                </a:solidFill>
+              </a:defRPr>
+            </a:pPr>
+            <a:r>
+              <a:t>Lavurn Nolen</a:t>
+            </a:r>
+            <a:br/>
+            <a:r>
+              <a:t>Doctor of Business Administration</a:t>
+            </a:r>
+            <a:br/>
+            <a:r>
+              <a:t>California Intercontinental University</a:t>
             </a:r>
           </a:p>
         </p:txBody>
@@ -5515,7 +4893,7 @@
               </a:defRPr>
             </a:pPr>
             <a:r>
-              <a:t>Presentation Overview</a:t>
+              <a:t>The Problem</a:t>
             </a:r>
           </a:p>
         </p:txBody>
@@ -5579,7 +4957,7 @@
           <a:p>
             <a:pPr>
               <a:spcAft>
-                <a:spcPts val="800"/>
+                <a:spcPts val="1000"/>
               </a:spcAft>
               <a:defRPr sz="1600">
                 <a:solidFill>
@@ -5588,13 +4966,13 @@
               </a:defRPr>
             </a:pPr>
             <a:r>
-              <a:t>• Background and Context: Small clinics and cybersecurity threats</a:t>
+              <a:t>• 133+ million patients affected by healthcare breaches in 2023</a:t>
             </a:r>
           </a:p>
           <a:p>
             <a:pPr>
               <a:spcAft>
-                <a:spcPts val="800"/>
+                <a:spcPts val="1000"/>
               </a:spcAft>
               <a:defRPr sz="1600">
                 <a:solidFill>
@@ -5603,13 +4981,13 @@
               </a:defRPr>
             </a:pPr>
             <a:r>
-              <a:t>• Research Problem and Purpose: IS governance gaps and patient satisfaction</a:t>
+              <a:t>• Small clinics operate without dedicated IT staff or security budgets</a:t>
             </a:r>
           </a:p>
           <a:p>
             <a:pPr>
               <a:spcAft>
-                <a:spcPts val="800"/>
+                <a:spcPts val="1000"/>
               </a:spcAft>
               <a:defRPr sz="1600">
                 <a:solidFill>
@@ -5618,13 +4996,13 @@
               </a:defRPr>
             </a:pPr>
             <a:r>
-              <a:t>• Literature Framework: NIST, HIPAA, and HICP standards</a:t>
+              <a:t>• Hospital-focused research has not examined this in small outpatient settings</a:t>
             </a:r>
           </a:p>
           <a:p>
             <a:pPr>
               <a:spcAft>
-                <a:spcPts val="800"/>
+                <a:spcPts val="1000"/>
               </a:spcAft>
               <a:defRPr sz="1600">
                 <a:solidFill>
@@ -5633,37 +5011,7 @@
               </a:defRPr>
             </a:pPr>
             <a:r>
-              <a:t>• Research Methodology: Qualitative single-case design</a:t>
-            </a:r>
-          </a:p>
-          <a:p>
-            <a:pPr>
-              <a:spcAft>
-                <a:spcPts val="800"/>
-              </a:spcAft>
-              <a:defRPr sz="1600">
-                <a:solidFill>
-                  <a:srgbClr val="333333"/>
-                </a:solidFill>
-              </a:defRPr>
-            </a:pPr>
-            <a:r>
-              <a:t>• Key Findings: Seven themes connecting governance to patient experience</a:t>
-            </a:r>
-          </a:p>
-          <a:p>
-            <a:pPr>
-              <a:spcAft>
-                <a:spcPts val="800"/>
-              </a:spcAft>
-              <a:defRPr sz="1600">
-                <a:solidFill>
-                  <a:srgbClr val="333333"/>
-                </a:solidFill>
-              </a:defRPr>
-            </a:pPr>
-            <a:r>
-              <a:t>• Implications and Recommendations: Actionable guidance for small practices</a:t>
+              <a:t>• Question: Does weak IS governance affect patient satisfaction?</a:t>
             </a:r>
           </a:p>
         </p:txBody>
@@ -5698,2012 +5046,7 @@
               </a:defRPr>
             </a:pPr>
             <a:r>
-              <a:t>Research Chair: Dr. Aarti Khanchandani</a:t>
-            </a:r>
-          </a:p>
-        </p:txBody>
-      </p:sp>
-    </p:spTree>
-  </p:cSld>
-  <p:clrMapOvr>
-    <a:masterClrMapping/>
-  </p:clrMapOvr>
-</p:sld>
-</file>
-
-<file path=ppt/slides/slide20.xml><?xml version="1.0" encoding="utf-8"?>
-<p:sld xmlns:a="http://schemas.openxmlformats.org/drawingml/2006/main" xmlns:p="http://schemas.openxmlformats.org/presentationml/2006/main" xmlns:r="http://schemas.openxmlformats.org/officeDocument/2006/relationships">
-  <p:cSld>
-    <p:bg>
-      <p:bgPr>
-        <a:solidFill>
-          <a:srgbClr val="FFFFFF"/>
-        </a:solidFill>
-        <a:effectLst/>
-      </p:bgPr>
-    </p:bg>
-    <p:spTree>
-      <p:nvGrpSpPr>
-        <p:cNvPr id="1" name=""/>
-        <p:cNvGrpSpPr/>
-        <p:nvPr/>
-      </p:nvGrpSpPr>
-      <p:grpSpPr/>
-      <p:sp>
-        <p:nvSpPr>
-          <p:cNvPr id="2" name="TextBox 1"/>
-          <p:cNvSpPr txBox="1"/>
-          <p:nvPr/>
-        </p:nvSpPr>
-        <p:spPr>
-          <a:xfrm>
-            <a:off x="457200" y="365760"/>
-            <a:ext cx="8229600" cy="548640"/>
-          </a:xfrm>
-          <a:prstGeom prst="rect">
-            <a:avLst/>
-          </a:prstGeom>
-          <a:noFill/>
-        </p:spPr>
-        <p:txBody>
-          <a:bodyPr wrap="square">
-            <a:spAutoFit/>
-          </a:bodyPr>
-          <a:lstStyle/>
-          <a:p>
-            <a:pPr>
-              <a:defRPr sz="2800" b="1">
-                <a:solidFill>
-                  <a:srgbClr val="1B3A6B"/>
-                </a:solidFill>
-              </a:defRPr>
-            </a:pPr>
-            <a:r>
-              <a:t>Study Delimitations (Scope Boundaries)</a:t>
-            </a:r>
-          </a:p>
-        </p:txBody>
-      </p:sp>
-      <p:cxnSp>
-        <p:nvCxnSpPr>
-          <p:cNvPr id="3" name="Connector 2"/>
-          <p:cNvCxnSpPr/>
-          <p:nvPr/>
-        </p:nvCxnSpPr>
-        <p:spPr>
-          <a:xfrm>
-            <a:off x="457200" y="1005840"/>
-            <a:ext cx="8229600" cy="0"/>
-          </a:xfrm>
-          <a:prstGeom prst="line">
-            <a:avLst/>
-          </a:prstGeom>
-          <a:ln w="25400">
-            <a:solidFill>
-              <a:srgbClr val="4A90E2"/>
-            </a:solidFill>
-          </a:ln>
-        </p:spPr>
-        <p:style>
-          <a:lnRef idx="2">
-            <a:schemeClr val="accent1"/>
-          </a:lnRef>
-          <a:fillRef idx="0">
-            <a:schemeClr val="accent1"/>
-          </a:fillRef>
-          <a:effectRef idx="1">
-            <a:schemeClr val="accent1"/>
-          </a:effectRef>
-          <a:fontRef idx="minor">
-            <a:schemeClr val="tx1"/>
-          </a:fontRef>
-        </p:style>
-      </p:cxnSp>
-      <p:sp>
-        <p:nvSpPr>
-          <p:cNvPr id="4" name="TextBox 3"/>
-          <p:cNvSpPr txBox="1"/>
-          <p:nvPr/>
-        </p:nvSpPr>
-        <p:spPr>
-          <a:xfrm>
-            <a:off x="640080" y="1234440"/>
-            <a:ext cx="8046720" cy="4754880"/>
-          </a:xfrm>
-          <a:prstGeom prst="rect">
-            <a:avLst/>
-          </a:prstGeom>
-          <a:noFill/>
-        </p:spPr>
-        <p:txBody>
-          <a:bodyPr wrap="square">
-            <a:spAutoFit/>
-          </a:bodyPr>
-          <a:lstStyle/>
-          <a:p>
-            <a:pPr>
-              <a:spcAft>
-                <a:spcPts val="800"/>
-              </a:spcAft>
-              <a:defRPr sz="1600">
-                <a:solidFill>
-                  <a:srgbClr val="333333"/>
-                </a:solidFill>
-              </a:defRPr>
-            </a:pPr>
-            <a:r>
-              <a:t>• One organization: NP Clinic as small, independently owned outpatient practice</a:t>
-            </a:r>
-          </a:p>
-          <a:p>
-            <a:pPr>
-              <a:spcAft>
-                <a:spcPts val="800"/>
-              </a:spcAft>
-              <a:defRPr sz="1600">
-                <a:solidFill>
-                  <a:srgbClr val="333333"/>
-                </a:solidFill>
-              </a:defRPr>
-            </a:pPr>
-            <a:r>
-              <a:t>• Two participant groups: Track A (technical), Track B (clinical staff)</a:t>
-            </a:r>
-          </a:p>
-          <a:p>
-            <a:pPr>
-              <a:spcAft>
-                <a:spcPts val="800"/>
-              </a:spcAft>
-              <a:defRPr sz="1600">
-                <a:solidFill>
-                  <a:srgbClr val="333333"/>
-                </a:solidFill>
-              </a:defRPr>
-            </a:pPr>
-            <a:r>
-              <a:t>• Three frameworks: NIST, HIPAA, HICP</a:t>
-            </a:r>
-          </a:p>
-          <a:p>
-            <a:pPr>
-              <a:spcAft>
-                <a:spcPts val="800"/>
-              </a:spcAft>
-              <a:defRPr sz="1600">
-                <a:solidFill>
-                  <a:srgbClr val="333333"/>
-                </a:solidFill>
-              </a:defRPr>
-            </a:pPr>
-            <a:r>
-              <a:t>• One outcome measure: CG-CAHPS-aligned patient experience</a:t>
-            </a:r>
-          </a:p>
-          <a:p>
-            <a:pPr>
-              <a:spcAft>
-                <a:spcPts val="800"/>
-              </a:spcAft>
-              <a:defRPr sz="1600">
-                <a:solidFill>
-                  <a:srgbClr val="333333"/>
-                </a:solidFill>
-              </a:defRPr>
-            </a:pPr>
-            <a:r>
-              <a:t>• Data limited to interviews; deliberately excludes clinic records and technology logs</a:t>
-            </a:r>
-          </a:p>
-          <a:p>
-            <a:pPr>
-              <a:spcAft>
-                <a:spcPts val="800"/>
-              </a:spcAft>
-              <a:defRPr sz="1600">
-                <a:solidFill>
-                  <a:srgbClr val="333333"/>
-                </a:solidFill>
-              </a:defRPr>
-            </a:pPr>
-            <a:r>
-              <a:t>• Bounded to current practices and recent technology-incident history</a:t>
-            </a:r>
-          </a:p>
-        </p:txBody>
-      </p:sp>
-    </p:spTree>
-  </p:cSld>
-  <p:clrMapOvr>
-    <a:masterClrMapping/>
-  </p:clrMapOvr>
-</p:sld>
-</file>
-
-<file path=ppt/slides/slide21.xml><?xml version="1.0" encoding="utf-8"?>
-<p:sld xmlns:a="http://schemas.openxmlformats.org/drawingml/2006/main" xmlns:p="http://schemas.openxmlformats.org/presentationml/2006/main" xmlns:r="http://schemas.openxmlformats.org/officeDocument/2006/relationships">
-  <p:cSld>
-    <p:bg>
-      <p:bgPr>
-        <a:solidFill>
-          <a:srgbClr val="FFFFFF"/>
-        </a:solidFill>
-        <a:effectLst/>
-      </p:bgPr>
-    </p:bg>
-    <p:spTree>
-      <p:nvGrpSpPr>
-        <p:cNvPr id="1" name=""/>
-        <p:cNvGrpSpPr/>
-        <p:nvPr/>
-      </p:nvGrpSpPr>
-      <p:grpSpPr/>
-      <p:sp>
-        <p:nvSpPr>
-          <p:cNvPr id="2" name="TextBox 1"/>
-          <p:cNvSpPr txBox="1"/>
-          <p:nvPr/>
-        </p:nvSpPr>
-        <p:spPr>
-          <a:xfrm>
-            <a:off x="457200" y="365760"/>
-            <a:ext cx="8229600" cy="548640"/>
-          </a:xfrm>
-          <a:prstGeom prst="rect">
-            <a:avLst/>
-          </a:prstGeom>
-          <a:noFill/>
-        </p:spPr>
-        <p:txBody>
-          <a:bodyPr wrap="square">
-            <a:spAutoFit/>
-          </a:bodyPr>
-          <a:lstStyle/>
-          <a:p>
-            <a:pPr>
-              <a:defRPr sz="2800" b="1">
-                <a:solidFill>
-                  <a:srgbClr val="1B3A6B"/>
-                </a:solidFill>
-              </a:defRPr>
-            </a:pPr>
-            <a:r>
-              <a:t>Results Overview</a:t>
-            </a:r>
-          </a:p>
-        </p:txBody>
-      </p:sp>
-      <p:cxnSp>
-        <p:nvCxnSpPr>
-          <p:cNvPr id="3" name="Connector 2"/>
-          <p:cNvCxnSpPr/>
-          <p:nvPr/>
-        </p:nvCxnSpPr>
-        <p:spPr>
-          <a:xfrm>
-            <a:off x="457200" y="1005840"/>
-            <a:ext cx="8229600" cy="0"/>
-          </a:xfrm>
-          <a:prstGeom prst="line">
-            <a:avLst/>
-          </a:prstGeom>
-          <a:ln w="25400">
-            <a:solidFill>
-              <a:srgbClr val="4A90E2"/>
-            </a:solidFill>
-          </a:ln>
-        </p:spPr>
-        <p:style>
-          <a:lnRef idx="2">
-            <a:schemeClr val="accent1"/>
-          </a:lnRef>
-          <a:fillRef idx="0">
-            <a:schemeClr val="accent1"/>
-          </a:fillRef>
-          <a:effectRef idx="1">
-            <a:schemeClr val="accent1"/>
-          </a:effectRef>
-          <a:fontRef idx="minor">
-            <a:schemeClr val="tx1"/>
-          </a:fontRef>
-        </p:style>
-      </p:cxnSp>
-      <p:sp>
-        <p:nvSpPr>
-          <p:cNvPr id="4" name="TextBox 3"/>
-          <p:cNvSpPr txBox="1"/>
-          <p:nvPr/>
-        </p:nvSpPr>
-        <p:spPr>
-          <a:xfrm>
-            <a:off x="640080" y="1234440"/>
-            <a:ext cx="8046720" cy="4754880"/>
-          </a:xfrm>
-          <a:prstGeom prst="rect">
-            <a:avLst/>
-          </a:prstGeom>
-          <a:noFill/>
-        </p:spPr>
-        <p:txBody>
-          <a:bodyPr wrap="square">
-            <a:spAutoFit/>
-          </a:bodyPr>
-          <a:lstStyle/>
-          <a:p>
-            <a:pPr>
-              <a:spcAft>
-                <a:spcPts val="800"/>
-              </a:spcAft>
-              <a:defRPr sz="1600">
-                <a:solidFill>
-                  <a:srgbClr val="333333"/>
-                </a:solidFill>
-              </a:defRPr>
-            </a:pPr>
-            <a:r>
-              <a:t>• Seven themes emerged from analysis of 7 completed interviews</a:t>
-            </a:r>
-          </a:p>
-          <a:p>
-            <a:pPr>
-              <a:spcAft>
-                <a:spcPts val="800"/>
-              </a:spcAft>
-              <a:defRPr sz="1600">
-                <a:solidFill>
-                  <a:srgbClr val="333333"/>
-                </a:solidFill>
-              </a:defRPr>
-            </a:pPr>
-            <a:r>
-              <a:t>• Track A: 2 IT/cybersecurity staff</a:t>
-            </a:r>
-          </a:p>
-          <a:p>
-            <a:pPr>
-              <a:spcAft>
-                <a:spcPts val="800"/>
-              </a:spcAft>
-              <a:defRPr sz="1600">
-                <a:solidFill>
-                  <a:srgbClr val="333333"/>
-                </a:solidFill>
-              </a:defRPr>
-            </a:pPr>
-            <a:r>
-              <a:t>• Track B: 5 clinical staff (1 recruited but unable to complete)</a:t>
-            </a:r>
-          </a:p>
-          <a:p>
-            <a:pPr>
-              <a:spcAft>
-                <a:spcPts val="800"/>
-              </a:spcAft>
-              <a:defRPr sz="1600">
-                <a:solidFill>
-                  <a:srgbClr val="333333"/>
-                </a:solidFill>
-              </a:defRPr>
-            </a:pPr>
-            <a:r>
-              <a:t>• Saturation reached: No new codes in final two interviews of either track</a:t>
-            </a:r>
-          </a:p>
-          <a:p>
-            <a:pPr>
-              <a:spcAft>
-                <a:spcPts val="800"/>
-              </a:spcAft>
-              <a:defRPr sz="1600">
-                <a:solidFill>
-                  <a:srgbClr val="333333"/>
-                </a:solidFill>
-              </a:defRPr>
-            </a:pPr>
-            <a:r>
-              <a:t>• Themes organized by research question alignment</a:t>
-            </a:r>
-          </a:p>
-          <a:p>
-            <a:pPr>
-              <a:spcAft>
-                <a:spcPts val="800"/>
-              </a:spcAft>
-              <a:defRPr sz="1600">
-                <a:solidFill>
-                  <a:srgbClr val="333333"/>
-                </a:solidFill>
-              </a:defRPr>
-            </a:pPr>
-            <a:r>
-              <a:t>• Evidence supported by direct participant quotations</a:t>
-            </a:r>
-          </a:p>
-        </p:txBody>
-      </p:sp>
-      <p:sp>
-        <p:nvSpPr>
-          <p:cNvPr id="5" name="TextBox 4"/>
-          <p:cNvSpPr txBox="1"/>
-          <p:nvPr/>
-        </p:nvSpPr>
-        <p:spPr>
-          <a:xfrm>
-            <a:off x="640080" y="5943600"/>
-            <a:ext cx="8046720" cy="822960"/>
-          </a:xfrm>
-          <a:prstGeom prst="rect">
-            <a:avLst/>
-          </a:prstGeom>
-          <a:noFill/>
-        </p:spPr>
-        <p:txBody>
-          <a:bodyPr wrap="square">
-            <a:spAutoFit/>
-          </a:bodyPr>
-          <a:lstStyle/>
-          <a:p>
-            <a:pPr>
-              <a:defRPr sz="1000" i="1">
-                <a:solidFill>
-                  <a:srgbClr val="333333"/>
-                </a:solidFill>
-              </a:defRPr>
-            </a:pPr>
-            <a:r>
-              <a:t>(Guest et al., 2020)</a:t>
-            </a:r>
-          </a:p>
-        </p:txBody>
-      </p:sp>
-    </p:spTree>
-  </p:cSld>
-  <p:clrMapOvr>
-    <a:masterClrMapping/>
-  </p:clrMapOvr>
-</p:sld>
-</file>
-
-<file path=ppt/slides/slide22.xml><?xml version="1.0" encoding="utf-8"?>
-<p:sld xmlns:a="http://schemas.openxmlformats.org/drawingml/2006/main" xmlns:p="http://schemas.openxmlformats.org/presentationml/2006/main" xmlns:r="http://schemas.openxmlformats.org/officeDocument/2006/relationships">
-  <p:cSld>
-    <p:bg>
-      <p:bgPr>
-        <a:solidFill>
-          <a:srgbClr val="FFFFFF"/>
-        </a:solidFill>
-        <a:effectLst/>
-      </p:bgPr>
-    </p:bg>
-    <p:spTree>
-      <p:nvGrpSpPr>
-        <p:cNvPr id="1" name=""/>
-        <p:cNvGrpSpPr/>
-        <p:nvPr/>
-      </p:nvGrpSpPr>
-      <p:grpSpPr/>
-      <p:sp>
-        <p:nvSpPr>
-          <p:cNvPr id="2" name="TextBox 1"/>
-          <p:cNvSpPr txBox="1"/>
-          <p:nvPr/>
-        </p:nvSpPr>
-        <p:spPr>
-          <a:xfrm>
-            <a:off x="457200" y="365760"/>
-            <a:ext cx="8229600" cy="548640"/>
-          </a:xfrm>
-          <a:prstGeom prst="rect">
-            <a:avLst/>
-          </a:prstGeom>
-          <a:noFill/>
-        </p:spPr>
-        <p:txBody>
-          <a:bodyPr wrap="square">
-            <a:spAutoFit/>
-          </a:bodyPr>
-          <a:lstStyle/>
-          <a:p>
-            <a:pPr>
-              <a:defRPr sz="2800" b="1">
-                <a:solidFill>
-                  <a:srgbClr val="1B3A6B"/>
-                </a:solidFill>
-              </a:defRPr>
-            </a:pPr>
-            <a:r>
-              <a:t>Theme 1: Governance Vacuum and Informal Decision Making</a:t>
-            </a:r>
-          </a:p>
-        </p:txBody>
-      </p:sp>
-      <p:cxnSp>
-        <p:nvCxnSpPr>
-          <p:cNvPr id="3" name="Connector 2"/>
-          <p:cNvCxnSpPr/>
-          <p:nvPr/>
-        </p:nvCxnSpPr>
-        <p:spPr>
-          <a:xfrm>
-            <a:off x="457200" y="1005840"/>
-            <a:ext cx="8229600" cy="0"/>
-          </a:xfrm>
-          <a:prstGeom prst="line">
-            <a:avLst/>
-          </a:prstGeom>
-          <a:ln w="25400">
-            <a:solidFill>
-              <a:srgbClr val="4A90E2"/>
-            </a:solidFill>
-          </a:ln>
-        </p:spPr>
-        <p:style>
-          <a:lnRef idx="2">
-            <a:schemeClr val="accent1"/>
-          </a:lnRef>
-          <a:fillRef idx="0">
-            <a:schemeClr val="accent1"/>
-          </a:fillRef>
-          <a:effectRef idx="1">
-            <a:schemeClr val="accent1"/>
-          </a:effectRef>
-          <a:fontRef idx="minor">
-            <a:schemeClr val="tx1"/>
-          </a:fontRef>
-        </p:style>
-      </p:cxnSp>
-      <p:sp>
-        <p:nvSpPr>
-          <p:cNvPr id="4" name="TextBox 3"/>
-          <p:cNvSpPr txBox="1"/>
-          <p:nvPr/>
-        </p:nvSpPr>
-        <p:spPr>
-          <a:xfrm>
-            <a:off x="640080" y="1234440"/>
-            <a:ext cx="8046720" cy="4754880"/>
-          </a:xfrm>
-          <a:prstGeom prst="rect">
-            <a:avLst/>
-          </a:prstGeom>
-          <a:noFill/>
-        </p:spPr>
-        <p:txBody>
-          <a:bodyPr wrap="square">
-            <a:spAutoFit/>
-          </a:bodyPr>
-          <a:lstStyle/>
-          <a:p>
-            <a:pPr>
-              <a:spcAft>
-                <a:spcPts val="800"/>
-              </a:spcAft>
-              <a:defRPr sz="1600">
-                <a:solidFill>
-                  <a:srgbClr val="333333"/>
-                </a:solidFill>
-              </a:defRPr>
-            </a:pPr>
-            <a:r>
-              <a:t>• No formal IS governance structure exists at NP Clinic</a:t>
-            </a:r>
-          </a:p>
-          <a:p>
-            <a:pPr>
-              <a:spcAft>
-                <a:spcPts val="800"/>
-              </a:spcAft>
-              <a:defRPr sz="1600">
-                <a:solidFill>
-                  <a:srgbClr val="333333"/>
-                </a:solidFill>
-              </a:defRPr>
-            </a:pPr>
-            <a:r>
-              <a:t>• Technology decisions driven by immediate operational need, not planned strategy</a:t>
-            </a:r>
-          </a:p>
-          <a:p>
-            <a:pPr>
-              <a:spcAft>
-                <a:spcPts val="800"/>
-              </a:spcAft>
-              <a:defRPr sz="1600">
-                <a:solidFill>
-                  <a:srgbClr val="333333"/>
-                </a:solidFill>
-              </a:defRPr>
-            </a:pPr>
-            <a:r>
-              <a:t>• Whoever holds informal IT responsibility makes decisions without documented rationale</a:t>
-            </a:r>
-          </a:p>
-          <a:p>
-            <a:pPr>
-              <a:spcAft>
-                <a:spcPts val="800"/>
-              </a:spcAft>
-              <a:defRPr sz="1600">
-                <a:solidFill>
-                  <a:srgbClr val="333333"/>
-                </a:solidFill>
-              </a:defRPr>
-            </a:pPr>
-            <a:r>
-              <a:t>• Practice owner unaware of cybersecurity requirements in HIPAA or other frameworks</a:t>
-            </a:r>
-          </a:p>
-          <a:p>
-            <a:pPr>
-              <a:spcAft>
-                <a:spcPts val="800"/>
-              </a:spcAft>
-              <a:defRPr sz="1600">
-                <a:solidFill>
-                  <a:srgbClr val="333333"/>
-                </a:solidFill>
-              </a:defRPr>
-            </a:pPr>
-            <a:r>
-              <a:t>• No incident response plan or formal risk assessment present</a:t>
-            </a:r>
-          </a:p>
-        </p:txBody>
-      </p:sp>
-    </p:spTree>
-  </p:cSld>
-  <p:clrMapOvr>
-    <a:masterClrMapping/>
-  </p:clrMapOvr>
-</p:sld>
-</file>
-
-<file path=ppt/slides/slide23.xml><?xml version="1.0" encoding="utf-8"?>
-<p:sld xmlns:a="http://schemas.openxmlformats.org/drawingml/2006/main" xmlns:p="http://schemas.openxmlformats.org/presentationml/2006/main" xmlns:r="http://schemas.openxmlformats.org/officeDocument/2006/relationships">
-  <p:cSld>
-    <p:bg>
-      <p:bgPr>
-        <a:solidFill>
-          <a:srgbClr val="FFFFFF"/>
-        </a:solidFill>
-        <a:effectLst/>
-      </p:bgPr>
-    </p:bg>
-    <p:spTree>
-      <p:nvGrpSpPr>
-        <p:cNvPr id="1" name=""/>
-        <p:cNvGrpSpPr/>
-        <p:nvPr/>
-      </p:nvGrpSpPr>
-      <p:grpSpPr/>
-      <p:sp>
-        <p:nvSpPr>
-          <p:cNvPr id="2" name="TextBox 1"/>
-          <p:cNvSpPr txBox="1"/>
-          <p:nvPr/>
-        </p:nvSpPr>
-        <p:spPr>
-          <a:xfrm>
-            <a:off x="457200" y="365760"/>
-            <a:ext cx="8229600" cy="548640"/>
-          </a:xfrm>
-          <a:prstGeom prst="rect">
-            <a:avLst/>
-          </a:prstGeom>
-          <a:noFill/>
-        </p:spPr>
-        <p:txBody>
-          <a:bodyPr wrap="square">
-            <a:spAutoFit/>
-          </a:bodyPr>
-          <a:lstStyle/>
-          <a:p>
-            <a:pPr>
-              <a:defRPr sz="2800" b="1">
-                <a:solidFill>
-                  <a:srgbClr val="1B3A6B"/>
-                </a:solidFill>
-              </a:defRPr>
-            </a:pPr>
-            <a:r>
-              <a:t>Theme 2: Frameworks in the Head, Not on Paper</a:t>
-            </a:r>
-          </a:p>
-        </p:txBody>
-      </p:sp>
-      <p:cxnSp>
-        <p:nvCxnSpPr>
-          <p:cNvPr id="3" name="Connector 2"/>
-          <p:cNvCxnSpPr/>
-          <p:nvPr/>
-        </p:nvCxnSpPr>
-        <p:spPr>
-          <a:xfrm>
-            <a:off x="457200" y="1005840"/>
-            <a:ext cx="8229600" cy="0"/>
-          </a:xfrm>
-          <a:prstGeom prst="line">
-            <a:avLst/>
-          </a:prstGeom>
-          <a:ln w="25400">
-            <a:solidFill>
-              <a:srgbClr val="4A90E2"/>
-            </a:solidFill>
-          </a:ln>
-        </p:spPr>
-        <p:style>
-          <a:lnRef idx="2">
-            <a:schemeClr val="accent1"/>
-          </a:lnRef>
-          <a:fillRef idx="0">
-            <a:schemeClr val="accent1"/>
-          </a:fillRef>
-          <a:effectRef idx="1">
-            <a:schemeClr val="accent1"/>
-          </a:effectRef>
-          <a:fontRef idx="minor">
-            <a:schemeClr val="tx1"/>
-          </a:fontRef>
-        </p:style>
-      </p:cxnSp>
-      <p:sp>
-        <p:nvSpPr>
-          <p:cNvPr id="4" name="TextBox 3"/>
-          <p:cNvSpPr txBox="1"/>
-          <p:nvPr/>
-        </p:nvSpPr>
-        <p:spPr>
-          <a:xfrm>
-            <a:off x="640080" y="1234440"/>
-            <a:ext cx="8046720" cy="4754880"/>
-          </a:xfrm>
-          <a:prstGeom prst="rect">
-            <a:avLst/>
-          </a:prstGeom>
-          <a:noFill/>
-        </p:spPr>
-        <p:txBody>
-          <a:bodyPr wrap="square">
-            <a:spAutoFit/>
-          </a:bodyPr>
-          <a:lstStyle/>
-          <a:p>
-            <a:pPr>
-              <a:spcAft>
-                <a:spcPts val="800"/>
-              </a:spcAft>
-              <a:defRPr sz="1600">
-                <a:solidFill>
-                  <a:srgbClr val="333333"/>
-                </a:solidFill>
-              </a:defRPr>
-            </a:pPr>
-            <a:r>
-              <a:t>• Track A staff familiar with governance concepts but no formal documentation exists</a:t>
-            </a:r>
-          </a:p>
-          <a:p>
-            <a:pPr>
-              <a:spcAft>
-                <a:spcPts val="800"/>
-              </a:spcAft>
-              <a:defRPr sz="1600">
-                <a:solidFill>
-                  <a:srgbClr val="333333"/>
-                </a:solidFill>
-              </a:defRPr>
-            </a:pPr>
-            <a:r>
-              <a:t>• Knowledge exists as individual competency, not institutional policy</a:t>
-            </a:r>
-          </a:p>
-          <a:p>
-            <a:pPr>
-              <a:spcAft>
-                <a:spcPts val="800"/>
-              </a:spcAft>
-              <a:defRPr sz="1600">
-                <a:solidFill>
-                  <a:srgbClr val="333333"/>
-                </a:solidFill>
-              </a:defRPr>
-            </a:pPr>
-            <a:r>
-              <a:t>• No written procedures for access control, incident response, or security training</a:t>
-            </a:r>
-          </a:p>
-          <a:p>
-            <a:pPr>
-              <a:spcAft>
-                <a:spcPts val="800"/>
-              </a:spcAft>
-              <a:defRPr sz="1600">
-                <a:solidFill>
-                  <a:srgbClr val="333333"/>
-                </a:solidFill>
-              </a:defRPr>
-            </a:pPr>
-            <a:r>
-              <a:t>• Staff workarounds developed informally to address gaps</a:t>
-            </a:r>
-          </a:p>
-          <a:p>
-            <a:pPr>
-              <a:spcAft>
-                <a:spcPts val="800"/>
-              </a:spcAft>
-              <a:defRPr sz="1600">
-                <a:solidFill>
-                  <a:srgbClr val="333333"/>
-                </a:solidFill>
-              </a:defRPr>
-            </a:pPr>
-            <a:r>
-              <a:t>• Framework knowledge inaccessible to new staff or during staff transitions</a:t>
-            </a:r>
-          </a:p>
-        </p:txBody>
-      </p:sp>
-    </p:spTree>
-  </p:cSld>
-  <p:clrMapOvr>
-    <a:masterClrMapping/>
-  </p:clrMapOvr>
-</p:sld>
-</file>
-
-<file path=ppt/slides/slide24.xml><?xml version="1.0" encoding="utf-8"?>
-<p:sld xmlns:a="http://schemas.openxmlformats.org/drawingml/2006/main" xmlns:p="http://schemas.openxmlformats.org/presentationml/2006/main" xmlns:r="http://schemas.openxmlformats.org/officeDocument/2006/relationships">
-  <p:cSld>
-    <p:bg>
-      <p:bgPr>
-        <a:solidFill>
-          <a:srgbClr val="FFFFFF"/>
-        </a:solidFill>
-        <a:effectLst/>
-      </p:bgPr>
-    </p:bg>
-    <p:spTree>
-      <p:nvGrpSpPr>
-        <p:cNvPr id="1" name=""/>
-        <p:cNvGrpSpPr/>
-        <p:nvPr/>
-      </p:nvGrpSpPr>
-      <p:grpSpPr/>
-      <p:sp>
-        <p:nvSpPr>
-          <p:cNvPr id="2" name="TextBox 1"/>
-          <p:cNvSpPr txBox="1"/>
-          <p:nvPr/>
-        </p:nvSpPr>
-        <p:spPr>
-          <a:xfrm>
-            <a:off x="457200" y="365760"/>
-            <a:ext cx="8229600" cy="548640"/>
-          </a:xfrm>
-          <a:prstGeom prst="rect">
-            <a:avLst/>
-          </a:prstGeom>
-          <a:noFill/>
-        </p:spPr>
-        <p:txBody>
-          <a:bodyPr wrap="square">
-            <a:spAutoFit/>
-          </a:bodyPr>
-          <a:lstStyle/>
-          <a:p>
-            <a:pPr>
-              <a:defRPr sz="2800" b="1">
-                <a:solidFill>
-                  <a:srgbClr val="1B3A6B"/>
-                </a:solidFill>
-              </a:defRPr>
-            </a:pPr>
-            <a:r>
-              <a:t>Theme 3: Vendor Dependency and Loss of Control</a:t>
-            </a:r>
-          </a:p>
-        </p:txBody>
-      </p:sp>
-      <p:cxnSp>
-        <p:nvCxnSpPr>
-          <p:cNvPr id="3" name="Connector 2"/>
-          <p:cNvCxnSpPr/>
-          <p:nvPr/>
-        </p:nvCxnSpPr>
-        <p:spPr>
-          <a:xfrm>
-            <a:off x="457200" y="1005840"/>
-            <a:ext cx="8229600" cy="0"/>
-          </a:xfrm>
-          <a:prstGeom prst="line">
-            <a:avLst/>
-          </a:prstGeom>
-          <a:ln w="25400">
-            <a:solidFill>
-              <a:srgbClr val="4A90E2"/>
-            </a:solidFill>
-          </a:ln>
-        </p:spPr>
-        <p:style>
-          <a:lnRef idx="2">
-            <a:schemeClr val="accent1"/>
-          </a:lnRef>
-          <a:fillRef idx="0">
-            <a:schemeClr val="accent1"/>
-          </a:fillRef>
-          <a:effectRef idx="1">
-            <a:schemeClr val="accent1"/>
-          </a:effectRef>
-          <a:fontRef idx="minor">
-            <a:schemeClr val="tx1"/>
-          </a:fontRef>
-        </p:style>
-      </p:cxnSp>
-      <p:sp>
-        <p:nvSpPr>
-          <p:cNvPr id="4" name="TextBox 3"/>
-          <p:cNvSpPr txBox="1"/>
-          <p:nvPr/>
-        </p:nvSpPr>
-        <p:spPr>
-          <a:xfrm>
-            <a:off x="640080" y="1234440"/>
-            <a:ext cx="8046720" cy="4754880"/>
-          </a:xfrm>
-          <a:prstGeom prst="rect">
-            <a:avLst/>
-          </a:prstGeom>
-          <a:noFill/>
-        </p:spPr>
-        <p:txBody>
-          <a:bodyPr wrap="square">
-            <a:spAutoFit/>
-          </a:bodyPr>
-          <a:lstStyle/>
-          <a:p>
-            <a:pPr>
-              <a:spcAft>
-                <a:spcPts val="800"/>
-              </a:spcAft>
-              <a:defRPr sz="1600">
-                <a:solidFill>
-                  <a:srgbClr val="333333"/>
-                </a:solidFill>
-              </a:defRPr>
-            </a:pPr>
-            <a:r>
-              <a:t>• EHR and scheduling systems hosted by vendors with limited customization</a:t>
-            </a:r>
-          </a:p>
-          <a:p>
-            <a:pPr>
-              <a:spcAft>
-                <a:spcPts val="800"/>
-              </a:spcAft>
-              <a:defRPr sz="1600">
-                <a:solidFill>
-                  <a:srgbClr val="333333"/>
-                </a:solidFill>
-              </a:defRPr>
-            </a:pPr>
-            <a:r>
-              <a:t>• NP Clinic has minimal visibility into security configurations or vendor practices</a:t>
-            </a:r>
-          </a:p>
-          <a:p>
-            <a:pPr>
-              <a:spcAft>
-                <a:spcPts val="800"/>
-              </a:spcAft>
-              <a:defRPr sz="1600">
-                <a:solidFill>
-                  <a:srgbClr val="333333"/>
-                </a:solidFill>
-              </a:defRPr>
-            </a:pPr>
-            <a:r>
-              <a:t>• Outages affect clinic operations beyond clinic's direct control</a:t>
-            </a:r>
-          </a:p>
-          <a:p>
-            <a:pPr>
-              <a:spcAft>
-                <a:spcPts val="800"/>
-              </a:spcAft>
-              <a:defRPr sz="1600">
-                <a:solidFill>
-                  <a:srgbClr val="333333"/>
-                </a:solidFill>
-              </a:defRPr>
-            </a:pPr>
-            <a:r>
-              <a:t>• Limited ability to implement local security controls within vendor systems</a:t>
-            </a:r>
-          </a:p>
-          <a:p>
-            <a:pPr>
-              <a:spcAft>
-                <a:spcPts val="800"/>
-              </a:spcAft>
-              <a:defRPr sz="1600">
-                <a:solidFill>
-                  <a:srgbClr val="333333"/>
-                </a:solidFill>
-              </a:defRPr>
-            </a:pPr>
-            <a:r>
-              <a:t>• Dependency reduces clinic autonomy and constrains incident response</a:t>
-            </a:r>
-          </a:p>
-        </p:txBody>
-      </p:sp>
-    </p:spTree>
-  </p:cSld>
-  <p:clrMapOvr>
-    <a:masterClrMapping/>
-  </p:clrMapOvr>
-</p:sld>
-</file>
-
-<file path=ppt/slides/slide25.xml><?xml version="1.0" encoding="utf-8"?>
-<p:sld xmlns:a="http://schemas.openxmlformats.org/drawingml/2006/main" xmlns:p="http://schemas.openxmlformats.org/presentationml/2006/main" xmlns:r="http://schemas.openxmlformats.org/officeDocument/2006/relationships">
-  <p:cSld>
-    <p:bg>
-      <p:bgPr>
-        <a:solidFill>
-          <a:srgbClr val="FFFFFF"/>
-        </a:solidFill>
-        <a:effectLst/>
-      </p:bgPr>
-    </p:bg>
-    <p:spTree>
-      <p:nvGrpSpPr>
-        <p:cNvPr id="1" name=""/>
-        <p:cNvGrpSpPr/>
-        <p:nvPr/>
-      </p:nvGrpSpPr>
-      <p:grpSpPr/>
-      <p:sp>
-        <p:nvSpPr>
-          <p:cNvPr id="2" name="TextBox 1"/>
-          <p:cNvSpPr txBox="1"/>
-          <p:nvPr/>
-        </p:nvSpPr>
-        <p:spPr>
-          <a:xfrm>
-            <a:off x="457200" y="365760"/>
-            <a:ext cx="8229600" cy="548640"/>
-          </a:xfrm>
-          <a:prstGeom prst="rect">
-            <a:avLst/>
-          </a:prstGeom>
-          <a:noFill/>
-        </p:spPr>
-        <p:txBody>
-          <a:bodyPr wrap="square">
-            <a:spAutoFit/>
-          </a:bodyPr>
-          <a:lstStyle/>
-          <a:p>
-            <a:pPr>
-              <a:defRPr sz="2800" b="1">
-                <a:solidFill>
-                  <a:srgbClr val="1B3A6B"/>
-                </a:solidFill>
-              </a:defRPr>
-            </a:pPr>
-            <a:r>
-              <a:t>Theme 4: Privacy Training as Substitute for Security Training</a:t>
-            </a:r>
-          </a:p>
-        </p:txBody>
-      </p:sp>
-      <p:cxnSp>
-        <p:nvCxnSpPr>
-          <p:cNvPr id="3" name="Connector 2"/>
-          <p:cNvCxnSpPr/>
-          <p:nvPr/>
-        </p:nvCxnSpPr>
-        <p:spPr>
-          <a:xfrm>
-            <a:off x="457200" y="1005840"/>
-            <a:ext cx="8229600" cy="0"/>
-          </a:xfrm>
-          <a:prstGeom prst="line">
-            <a:avLst/>
-          </a:prstGeom>
-          <a:ln w="25400">
-            <a:solidFill>
-              <a:srgbClr val="4A90E2"/>
-            </a:solidFill>
-          </a:ln>
-        </p:spPr>
-        <p:style>
-          <a:lnRef idx="2">
-            <a:schemeClr val="accent1"/>
-          </a:lnRef>
-          <a:fillRef idx="0">
-            <a:schemeClr val="accent1"/>
-          </a:fillRef>
-          <a:effectRef idx="1">
-            <a:schemeClr val="accent1"/>
-          </a:effectRef>
-          <a:fontRef idx="minor">
-            <a:schemeClr val="tx1"/>
-          </a:fontRef>
-        </p:style>
-      </p:cxnSp>
-      <p:sp>
-        <p:nvSpPr>
-          <p:cNvPr id="4" name="TextBox 3"/>
-          <p:cNvSpPr txBox="1"/>
-          <p:nvPr/>
-        </p:nvSpPr>
-        <p:spPr>
-          <a:xfrm>
-            <a:off x="640080" y="1234440"/>
-            <a:ext cx="8046720" cy="4754880"/>
-          </a:xfrm>
-          <a:prstGeom prst="rect">
-            <a:avLst/>
-          </a:prstGeom>
-          <a:noFill/>
-        </p:spPr>
-        <p:txBody>
-          <a:bodyPr wrap="square">
-            <a:spAutoFit/>
-          </a:bodyPr>
-          <a:lstStyle/>
-          <a:p>
-            <a:pPr>
-              <a:spcAft>
-                <a:spcPts val="800"/>
-              </a:spcAft>
-              <a:defRPr sz="1600">
-                <a:solidFill>
-                  <a:srgbClr val="333333"/>
-                </a:solidFill>
-              </a:defRPr>
-            </a:pPr>
-            <a:r>
-              <a:t>• Annual HIPAA privacy training conducted but focused on compliance</a:t>
-            </a:r>
-          </a:p>
-          <a:p>
-            <a:pPr>
-              <a:spcAft>
-                <a:spcPts val="800"/>
-              </a:spcAft>
-              <a:defRPr sz="1600">
-                <a:solidFill>
-                  <a:srgbClr val="333333"/>
-                </a:solidFill>
-              </a:defRPr>
-            </a:pPr>
-            <a:r>
-              <a:t>• Staff unable to distinguish privacy (information use) from security (protection)</a:t>
-            </a:r>
-          </a:p>
-          <a:p>
-            <a:pPr>
-              <a:spcAft>
-                <a:spcPts val="800"/>
-              </a:spcAft>
-              <a:defRPr sz="1600">
-                <a:solidFill>
-                  <a:srgbClr val="333333"/>
-                </a:solidFill>
-              </a:defRPr>
-            </a:pPr>
-            <a:r>
-              <a:t>• No training on phishing, access control, or incident reporting</a:t>
-            </a:r>
-          </a:p>
-          <a:p>
-            <a:pPr>
-              <a:spcAft>
-                <a:spcPts val="800"/>
-              </a:spcAft>
-              <a:defRPr sz="1600">
-                <a:solidFill>
-                  <a:srgbClr val="333333"/>
-                </a:solidFill>
-              </a:defRPr>
-            </a:pPr>
-            <a:r>
-              <a:t>• Both Track A and Track B participants noted this gap</a:t>
-            </a:r>
-          </a:p>
-          <a:p>
-            <a:pPr>
-              <a:spcAft>
-                <a:spcPts val="800"/>
-              </a:spcAft>
-              <a:defRPr sz="1600">
-                <a:solidFill>
-                  <a:srgbClr val="333333"/>
-                </a:solidFill>
-              </a:defRPr>
-            </a:pPr>
-            <a:r>
-              <a:t>• Security awareness treated as IT responsibility, not organizational culture</a:t>
-            </a:r>
-          </a:p>
-        </p:txBody>
-      </p:sp>
-    </p:spTree>
-  </p:cSld>
-  <p:clrMapOvr>
-    <a:masterClrMapping/>
-  </p:clrMapOvr>
-</p:sld>
-</file>
-
-<file path=ppt/slides/slide26.xml><?xml version="1.0" encoding="utf-8"?>
-<p:sld xmlns:a="http://schemas.openxmlformats.org/drawingml/2006/main" xmlns:p="http://schemas.openxmlformats.org/presentationml/2006/main" xmlns:r="http://schemas.openxmlformats.org/officeDocument/2006/relationships">
-  <p:cSld>
-    <p:bg>
-      <p:bgPr>
-        <a:solidFill>
-          <a:srgbClr val="FFFFFF"/>
-        </a:solidFill>
-        <a:effectLst/>
-      </p:bgPr>
-    </p:bg>
-    <p:spTree>
-      <p:nvGrpSpPr>
-        <p:cNvPr id="1" name=""/>
-        <p:cNvGrpSpPr/>
-        <p:nvPr/>
-      </p:nvGrpSpPr>
-      <p:grpSpPr/>
-      <p:sp>
-        <p:nvSpPr>
-          <p:cNvPr id="2" name="TextBox 1"/>
-          <p:cNvSpPr txBox="1"/>
-          <p:nvPr/>
-        </p:nvSpPr>
-        <p:spPr>
-          <a:xfrm>
-            <a:off x="457200" y="365760"/>
-            <a:ext cx="8229600" cy="548640"/>
-          </a:xfrm>
-          <a:prstGeom prst="rect">
-            <a:avLst/>
-          </a:prstGeom>
-          <a:noFill/>
-        </p:spPr>
-        <p:txBody>
-          <a:bodyPr wrap="square">
-            <a:spAutoFit/>
-          </a:bodyPr>
-          <a:lstStyle/>
-          <a:p>
-            <a:pPr>
-              <a:defRPr sz="2800" b="1">
-                <a:solidFill>
-                  <a:srgbClr val="1B3A6B"/>
-                </a:solidFill>
-              </a:defRPr>
-            </a:pPr>
-            <a:r>
-              <a:t>Theme 5: Workarounds as Normalized Clinical Practice</a:t>
-            </a:r>
-          </a:p>
-        </p:txBody>
-      </p:sp>
-      <p:cxnSp>
-        <p:nvCxnSpPr>
-          <p:cNvPr id="3" name="Connector 2"/>
-          <p:cNvCxnSpPr/>
-          <p:nvPr/>
-        </p:nvCxnSpPr>
-        <p:spPr>
-          <a:xfrm>
-            <a:off x="457200" y="1005840"/>
-            <a:ext cx="8229600" cy="0"/>
-          </a:xfrm>
-          <a:prstGeom prst="line">
-            <a:avLst/>
-          </a:prstGeom>
-          <a:ln w="25400">
-            <a:solidFill>
-              <a:srgbClr val="4A90E2"/>
-            </a:solidFill>
-          </a:ln>
-        </p:spPr>
-        <p:style>
-          <a:lnRef idx="2">
-            <a:schemeClr val="accent1"/>
-          </a:lnRef>
-          <a:fillRef idx="0">
-            <a:schemeClr val="accent1"/>
-          </a:fillRef>
-          <a:effectRef idx="1">
-            <a:schemeClr val="accent1"/>
-          </a:effectRef>
-          <a:fontRef idx="minor">
-            <a:schemeClr val="tx1"/>
-          </a:fontRef>
-        </p:style>
-      </p:cxnSp>
-      <p:sp>
-        <p:nvSpPr>
-          <p:cNvPr id="4" name="TextBox 3"/>
-          <p:cNvSpPr txBox="1"/>
-          <p:nvPr/>
-        </p:nvSpPr>
-        <p:spPr>
-          <a:xfrm>
-            <a:off x="640080" y="1234440"/>
-            <a:ext cx="8046720" cy="4754880"/>
-          </a:xfrm>
-          <a:prstGeom prst="rect">
-            <a:avLst/>
-          </a:prstGeom>
-          <a:noFill/>
-        </p:spPr>
-        <p:txBody>
-          <a:bodyPr wrap="square">
-            <a:spAutoFit/>
-          </a:bodyPr>
-          <a:lstStyle/>
-          <a:p>
-            <a:pPr>
-              <a:spcAft>
-                <a:spcPts val="800"/>
-              </a:spcAft>
-              <a:defRPr sz="1600">
-                <a:solidFill>
-                  <a:srgbClr val="333333"/>
-                </a:solidFill>
-              </a:defRPr>
-            </a:pPr>
-            <a:r>
-              <a:t>• EHR outages prompt immediate shift to paper-based workarounds</a:t>
-            </a:r>
-          </a:p>
-          <a:p>
-            <a:pPr>
-              <a:spcAft>
-                <a:spcPts val="800"/>
-              </a:spcAft>
-              <a:defRPr sz="1600">
-                <a:solidFill>
-                  <a:srgbClr val="333333"/>
-                </a:solidFill>
-              </a:defRPr>
-            </a:pPr>
-            <a:r>
-              <a:t>• Manual processes become temporary normal during disruptions</a:t>
-            </a:r>
-          </a:p>
-          <a:p>
-            <a:pPr>
-              <a:spcAft>
-                <a:spcPts val="800"/>
-              </a:spcAft>
-              <a:defRPr sz="1600">
-                <a:solidFill>
-                  <a:srgbClr val="333333"/>
-                </a:solidFill>
-              </a:defRPr>
-            </a:pPr>
-            <a:r>
-              <a:t>• Staff accept workarounds as inevitable but express frustration</a:t>
-            </a:r>
-          </a:p>
-          <a:p>
-            <a:pPr>
-              <a:spcAft>
-                <a:spcPts val="800"/>
-              </a:spcAft>
-              <a:defRPr sz="1600">
-                <a:solidFill>
-                  <a:srgbClr val="333333"/>
-                </a:solidFill>
-              </a:defRPr>
-            </a:pPr>
-            <a:r>
-              <a:t>• No formal decision-making about when to shift between systems</a:t>
-            </a:r>
-          </a:p>
-          <a:p>
-            <a:pPr>
-              <a:spcAft>
-                <a:spcPts val="800"/>
-              </a:spcAft>
-              <a:defRPr sz="1600">
-                <a:solidFill>
-                  <a:srgbClr val="333333"/>
-                </a:solidFill>
-              </a:defRPr>
-            </a:pPr>
-            <a:r>
-              <a:t>• Workarounds remain undocumented, creating care continuity gaps</a:t>
-            </a:r>
-          </a:p>
-        </p:txBody>
-      </p:sp>
-    </p:spTree>
-  </p:cSld>
-  <p:clrMapOvr>
-    <a:masterClrMapping/>
-  </p:clrMapOvr>
-</p:sld>
-</file>
-
-<file path=ppt/slides/slide27.xml><?xml version="1.0" encoding="utf-8"?>
-<p:sld xmlns:a="http://schemas.openxmlformats.org/drawingml/2006/main" xmlns:p="http://schemas.openxmlformats.org/presentationml/2006/main" xmlns:r="http://schemas.openxmlformats.org/officeDocument/2006/relationships">
-  <p:cSld>
-    <p:bg>
-      <p:bgPr>
-        <a:solidFill>
-          <a:srgbClr val="FFFFFF"/>
-        </a:solidFill>
-        <a:effectLst/>
-      </p:bgPr>
-    </p:bg>
-    <p:spTree>
-      <p:nvGrpSpPr>
-        <p:cNvPr id="1" name=""/>
-        <p:cNvGrpSpPr/>
-        <p:nvPr/>
-      </p:nvGrpSpPr>
-      <p:grpSpPr/>
-      <p:sp>
-        <p:nvSpPr>
-          <p:cNvPr id="2" name="TextBox 1"/>
-          <p:cNvSpPr txBox="1"/>
-          <p:nvPr/>
-        </p:nvSpPr>
-        <p:spPr>
-          <a:xfrm>
-            <a:off x="457200" y="365760"/>
-            <a:ext cx="8229600" cy="548640"/>
-          </a:xfrm>
-          <a:prstGeom prst="rect">
-            <a:avLst/>
-          </a:prstGeom>
-          <a:noFill/>
-        </p:spPr>
-        <p:txBody>
-          <a:bodyPr wrap="square">
-            <a:spAutoFit/>
-          </a:bodyPr>
-          <a:lstStyle/>
-          <a:p>
-            <a:pPr>
-              <a:defRPr sz="2800" b="1">
-                <a:solidFill>
-                  <a:srgbClr val="1B3A6B"/>
-                </a:solidFill>
-              </a:defRPr>
-            </a:pPr>
-            <a:r>
-              <a:t>Theme 6: Time as the Currency of the Clinic</a:t>
-            </a:r>
-          </a:p>
-        </p:txBody>
-      </p:sp>
-      <p:cxnSp>
-        <p:nvCxnSpPr>
-          <p:cNvPr id="3" name="Connector 2"/>
-          <p:cNvCxnSpPr/>
-          <p:nvPr/>
-        </p:nvCxnSpPr>
-        <p:spPr>
-          <a:xfrm>
-            <a:off x="457200" y="1005840"/>
-            <a:ext cx="8229600" cy="0"/>
-          </a:xfrm>
-          <a:prstGeom prst="line">
-            <a:avLst/>
-          </a:prstGeom>
-          <a:ln w="25400">
-            <a:solidFill>
-              <a:srgbClr val="4A90E2"/>
-            </a:solidFill>
-          </a:ln>
-        </p:spPr>
-        <p:style>
-          <a:lnRef idx="2">
-            <a:schemeClr val="accent1"/>
-          </a:lnRef>
-          <a:fillRef idx="0">
-            <a:schemeClr val="accent1"/>
-          </a:fillRef>
-          <a:effectRef idx="1">
-            <a:schemeClr val="accent1"/>
-          </a:effectRef>
-          <a:fontRef idx="minor">
-            <a:schemeClr val="tx1"/>
-          </a:fontRef>
-        </p:style>
-      </p:cxnSp>
-      <p:sp>
-        <p:nvSpPr>
-          <p:cNvPr id="4" name="TextBox 3"/>
-          <p:cNvSpPr txBox="1"/>
-          <p:nvPr/>
-        </p:nvSpPr>
-        <p:spPr>
-          <a:xfrm>
-            <a:off x="640080" y="1234440"/>
-            <a:ext cx="8046720" cy="4754880"/>
-          </a:xfrm>
-          <a:prstGeom prst="rect">
-            <a:avLst/>
-          </a:prstGeom>
-          <a:noFill/>
-        </p:spPr>
-        <p:txBody>
-          <a:bodyPr wrap="square">
-            <a:spAutoFit/>
-          </a:bodyPr>
-          <a:lstStyle/>
-          <a:p>
-            <a:pPr>
-              <a:spcAft>
-                <a:spcPts val="800"/>
-              </a:spcAft>
-              <a:defRPr sz="1600">
-                <a:solidFill>
-                  <a:srgbClr val="333333"/>
-                </a:solidFill>
-              </a:defRPr>
-            </a:pPr>
-            <a:r>
-              <a:t>• Staff time is the clinic's most severely constrained resource</a:t>
-            </a:r>
-          </a:p>
-          <a:p>
-            <a:pPr>
-              <a:spcAft>
-                <a:spcPts val="800"/>
-              </a:spcAft>
-              <a:defRPr sz="1600">
-                <a:solidFill>
-                  <a:srgbClr val="333333"/>
-                </a:solidFill>
-              </a:defRPr>
-            </a:pPr>
-            <a:r>
-              <a:t>• Clinical obligations take priority over security-related work</a:t>
-            </a:r>
-          </a:p>
-          <a:p>
-            <a:pPr>
-              <a:spcAft>
-                <a:spcPts val="800"/>
-              </a:spcAft>
-              <a:defRPr sz="1600">
-                <a:solidFill>
-                  <a:srgbClr val="333333"/>
-                </a:solidFill>
-              </a:defRPr>
-            </a:pPr>
-            <a:r>
-              <a:t>• Technology maintenance competes directly with patient care for attention</a:t>
-            </a:r>
-          </a:p>
-          <a:p>
-            <a:pPr>
-              <a:spcAft>
-                <a:spcPts val="800"/>
-              </a:spcAft>
-              <a:defRPr sz="1600">
-                <a:solidFill>
-                  <a:srgbClr val="333333"/>
-                </a:solidFill>
-              </a:defRPr>
-            </a:pPr>
-            <a:r>
-              <a:t>• No dedicated IT staff means security falls to clinicians during patient downtime</a:t>
-            </a:r>
-          </a:p>
-          <a:p>
-            <a:pPr>
-              <a:spcAft>
-                <a:spcPts val="800"/>
-              </a:spcAft>
-              <a:defRPr sz="1600">
-                <a:solidFill>
-                  <a:srgbClr val="333333"/>
-                </a:solidFill>
-              </a:defRPr>
-            </a:pPr>
-            <a:r>
-              <a:t>• Organizational capacity to implement new practices is severely limited</a:t>
-            </a:r>
-          </a:p>
-        </p:txBody>
-      </p:sp>
-    </p:spTree>
-  </p:cSld>
-  <p:clrMapOvr>
-    <a:masterClrMapping/>
-  </p:clrMapOvr>
-</p:sld>
-</file>
-
-<file path=ppt/slides/slide28.xml><?xml version="1.0" encoding="utf-8"?>
-<p:sld xmlns:a="http://schemas.openxmlformats.org/drawingml/2006/main" xmlns:p="http://schemas.openxmlformats.org/presentationml/2006/main" xmlns:r="http://schemas.openxmlformats.org/officeDocument/2006/relationships">
-  <p:cSld>
-    <p:bg>
-      <p:bgPr>
-        <a:solidFill>
-          <a:srgbClr val="FFFFFF"/>
-        </a:solidFill>
-        <a:effectLst/>
-      </p:bgPr>
-    </p:bg>
-    <p:spTree>
-      <p:nvGrpSpPr>
-        <p:cNvPr id="1" name=""/>
-        <p:cNvGrpSpPr/>
-        <p:nvPr/>
-      </p:nvGrpSpPr>
-      <p:grpSpPr/>
-      <p:sp>
-        <p:nvSpPr>
-          <p:cNvPr id="2" name="TextBox 1"/>
-          <p:cNvSpPr txBox="1"/>
-          <p:nvPr/>
-        </p:nvSpPr>
-        <p:spPr>
-          <a:xfrm>
-            <a:off x="457200" y="365760"/>
-            <a:ext cx="8229600" cy="548640"/>
-          </a:xfrm>
-          <a:prstGeom prst="rect">
-            <a:avLst/>
-          </a:prstGeom>
-          <a:noFill/>
-        </p:spPr>
-        <p:txBody>
-          <a:bodyPr wrap="square">
-            <a:spAutoFit/>
-          </a:bodyPr>
-          <a:lstStyle/>
-          <a:p>
-            <a:pPr>
-              <a:defRPr sz="2800" b="1">
-                <a:solidFill>
-                  <a:srgbClr val="1B3A6B"/>
-                </a:solidFill>
-              </a:defRPr>
-            </a:pPr>
-            <a:r>
-              <a:t>Theme 7: Incident Awareness and Informal Detection</a:t>
-            </a:r>
-          </a:p>
-        </p:txBody>
-      </p:sp>
-      <p:cxnSp>
-        <p:nvCxnSpPr>
-          <p:cNvPr id="3" name="Connector 2"/>
-          <p:cNvCxnSpPr/>
-          <p:nvPr/>
-        </p:nvCxnSpPr>
-        <p:spPr>
-          <a:xfrm>
-            <a:off x="457200" y="1005840"/>
-            <a:ext cx="8229600" cy="0"/>
-          </a:xfrm>
-          <a:prstGeom prst="line">
-            <a:avLst/>
-          </a:prstGeom>
-          <a:ln w="25400">
-            <a:solidFill>
-              <a:srgbClr val="4A90E2"/>
-            </a:solidFill>
-          </a:ln>
-        </p:spPr>
-        <p:style>
-          <a:lnRef idx="2">
-            <a:schemeClr val="accent1"/>
-          </a:lnRef>
-          <a:fillRef idx="0">
-            <a:schemeClr val="accent1"/>
-          </a:fillRef>
-          <a:effectRef idx="1">
-            <a:schemeClr val="accent1"/>
-          </a:effectRef>
-          <a:fontRef idx="minor">
-            <a:schemeClr val="tx1"/>
-          </a:fontRef>
-        </p:style>
-      </p:cxnSp>
-      <p:sp>
-        <p:nvSpPr>
-          <p:cNvPr id="4" name="TextBox 3"/>
-          <p:cNvSpPr txBox="1"/>
-          <p:nvPr/>
-        </p:nvSpPr>
-        <p:spPr>
-          <a:xfrm>
-            <a:off x="640080" y="1234440"/>
-            <a:ext cx="8046720" cy="4754880"/>
-          </a:xfrm>
-          <a:prstGeom prst="rect">
-            <a:avLst/>
-          </a:prstGeom>
-          <a:noFill/>
-        </p:spPr>
-        <p:txBody>
-          <a:bodyPr wrap="square">
-            <a:spAutoFit/>
-          </a:bodyPr>
-          <a:lstStyle/>
-          <a:p>
-            <a:pPr>
-              <a:spcAft>
-                <a:spcPts val="800"/>
-              </a:spcAft>
-              <a:defRPr sz="1600">
-                <a:solidFill>
-                  <a:srgbClr val="333333"/>
-                </a:solidFill>
-              </a:defRPr>
-            </a:pPr>
-            <a:r>
-              <a:t>• Incidents detected informally (systems down, users call front desk)</a:t>
-            </a:r>
-          </a:p>
-          <a:p>
-            <a:pPr>
-              <a:spcAft>
-                <a:spcPts val="800"/>
-              </a:spcAft>
-              <a:defRPr sz="1600">
-                <a:solidFill>
-                  <a:srgbClr val="333333"/>
-                </a:solidFill>
-              </a:defRPr>
-            </a:pPr>
-            <a:r>
-              <a:t>• No formal monitoring or alerting system for security events</a:t>
-            </a:r>
-          </a:p>
-          <a:p>
-            <a:pPr>
-              <a:spcAft>
-                <a:spcPts val="800"/>
-              </a:spcAft>
-              <a:defRPr sz="1600">
-                <a:solidFill>
-                  <a:srgbClr val="333333"/>
-                </a:solidFill>
-              </a:defRPr>
-            </a:pPr>
-            <a:r>
-              <a:t>• Staff cannot reliably distinguish system failures from security incidents</a:t>
-            </a:r>
-          </a:p>
-          <a:p>
-            <a:pPr>
-              <a:spcAft>
-                <a:spcPts val="800"/>
-              </a:spcAft>
-              <a:defRPr sz="1600">
-                <a:solidFill>
-                  <a:srgbClr val="333333"/>
-                </a:solidFill>
-              </a:defRPr>
-            </a:pPr>
-            <a:r>
-              <a:t>• Recovery handled ad hoc; no formal incident logs or reviews</a:t>
-            </a:r>
-          </a:p>
-          <a:p>
-            <a:pPr>
-              <a:spcAft>
-                <a:spcPts val="800"/>
-              </a:spcAft>
-              <a:defRPr sz="1600">
-                <a:solidFill>
-                  <a:srgbClr val="333333"/>
-                </a:solidFill>
-              </a:defRPr>
-            </a:pPr>
-            <a:r>
-              <a:t>• Learning from incidents occurs tacitly, not systematically</a:t>
-            </a:r>
-          </a:p>
-        </p:txBody>
-      </p:sp>
-    </p:spTree>
-  </p:cSld>
-  <p:clrMapOvr>
-    <a:masterClrMapping/>
-  </p:clrMapOvr>
-</p:sld>
-</file>
-
-<file path=ppt/slides/slide29.xml><?xml version="1.0" encoding="utf-8"?>
-<p:sld xmlns:a="http://schemas.openxmlformats.org/drawingml/2006/main" xmlns:p="http://schemas.openxmlformats.org/presentationml/2006/main" xmlns:r="http://schemas.openxmlformats.org/officeDocument/2006/relationships">
-  <p:cSld>
-    <p:bg>
-      <p:bgPr>
-        <a:solidFill>
-          <a:srgbClr val="FFFFFF"/>
-        </a:solidFill>
-        <a:effectLst/>
-      </p:bgPr>
-    </p:bg>
-    <p:spTree>
-      <p:nvGrpSpPr>
-        <p:cNvPr id="1" name=""/>
-        <p:cNvGrpSpPr/>
-        <p:nvPr/>
-      </p:nvGrpSpPr>
-      <p:grpSpPr/>
-      <p:sp>
-        <p:nvSpPr>
-          <p:cNvPr id="2" name="TextBox 1"/>
-          <p:cNvSpPr txBox="1"/>
-          <p:nvPr/>
-        </p:nvSpPr>
-        <p:spPr>
-          <a:xfrm>
-            <a:off x="457200" y="365760"/>
-            <a:ext cx="8229600" cy="548640"/>
-          </a:xfrm>
-          <a:prstGeom prst="rect">
-            <a:avLst/>
-          </a:prstGeom>
-          <a:noFill/>
-        </p:spPr>
-        <p:txBody>
-          <a:bodyPr wrap="square">
-            <a:spAutoFit/>
-          </a:bodyPr>
-          <a:lstStyle/>
-          <a:p>
-            <a:pPr>
-              <a:defRPr sz="2800" b="1">
-                <a:solidFill>
-                  <a:srgbClr val="1B3A6B"/>
-                </a:solidFill>
-              </a:defRPr>
-            </a:pPr>
-            <a:r>
-              <a:t>Discussion: How Governance Gaps Manifest</a:t>
-            </a:r>
-          </a:p>
-        </p:txBody>
-      </p:sp>
-      <p:cxnSp>
-        <p:nvCxnSpPr>
-          <p:cNvPr id="3" name="Connector 2"/>
-          <p:cNvCxnSpPr/>
-          <p:nvPr/>
-        </p:nvCxnSpPr>
-        <p:spPr>
-          <a:xfrm>
-            <a:off x="457200" y="1005840"/>
-            <a:ext cx="8229600" cy="0"/>
-          </a:xfrm>
-          <a:prstGeom prst="line">
-            <a:avLst/>
-          </a:prstGeom>
-          <a:ln w="25400">
-            <a:solidFill>
-              <a:srgbClr val="4A90E2"/>
-            </a:solidFill>
-          </a:ln>
-        </p:spPr>
-        <p:style>
-          <a:lnRef idx="2">
-            <a:schemeClr val="accent1"/>
-          </a:lnRef>
-          <a:fillRef idx="0">
-            <a:schemeClr val="accent1"/>
-          </a:fillRef>
-          <a:effectRef idx="1">
-            <a:schemeClr val="accent1"/>
-          </a:effectRef>
-          <a:fontRef idx="minor">
-            <a:schemeClr val="tx1"/>
-          </a:fontRef>
-        </p:style>
-      </p:cxnSp>
-      <p:sp>
-        <p:nvSpPr>
-          <p:cNvPr id="4" name="TextBox 3"/>
-          <p:cNvSpPr txBox="1"/>
-          <p:nvPr/>
-        </p:nvSpPr>
-        <p:spPr>
-          <a:xfrm>
-            <a:off x="640080" y="1234440"/>
-            <a:ext cx="8046720" cy="4754880"/>
-          </a:xfrm>
-          <a:prstGeom prst="rect">
-            <a:avLst/>
-          </a:prstGeom>
-          <a:noFill/>
-        </p:spPr>
-        <p:txBody>
-          <a:bodyPr wrap="square">
-            <a:spAutoFit/>
-          </a:bodyPr>
-          <a:lstStyle/>
-          <a:p>
-            <a:pPr>
-              <a:spcAft>
-                <a:spcPts val="800"/>
-              </a:spcAft>
-              <a:defRPr sz="1600">
-                <a:solidFill>
-                  <a:srgbClr val="333333"/>
-                </a:solidFill>
-              </a:defRPr>
-            </a:pPr>
-            <a:r>
-              <a:t>• RQ1 examined how staff characterize IS governance gaps and adoption barriers</a:t>
-            </a:r>
-          </a:p>
-          <a:p>
-            <a:pPr>
-              <a:spcAft>
-                <a:spcPts val="800"/>
-              </a:spcAft>
-              <a:defRPr sz="1600">
-                <a:solidFill>
-                  <a:srgbClr val="333333"/>
-                </a:solidFill>
-              </a:defRPr>
-            </a:pPr>
-            <a:r>
-              <a:t>• Governance deficiencies span NIST, HIPAA, and HICP frameworks</a:t>
-            </a:r>
-          </a:p>
-          <a:p>
-            <a:pPr>
-              <a:spcAft>
-                <a:spcPts val="800"/>
-              </a:spcAft>
-              <a:defRPr sz="1600">
-                <a:solidFill>
-                  <a:srgbClr val="333333"/>
-                </a:solidFill>
-              </a:defRPr>
-            </a:pPr>
-            <a:r>
-              <a:t>• Barriers are resource-driven (time, budget, staffing), not knowledge-driven</a:t>
-            </a:r>
-          </a:p>
-          <a:p>
-            <a:pPr>
-              <a:spcAft>
-                <a:spcPts val="800"/>
-              </a:spcAft>
-              <a:defRPr sz="1600">
-                <a:solidFill>
-                  <a:srgbClr val="333333"/>
-                </a:solidFill>
-              </a:defRPr>
-            </a:pPr>
-            <a:r>
-              <a:t>• Practice owner and clinical staff awareness of cybersecurity expectations is limited</a:t>
-            </a:r>
-          </a:p>
-          <a:p>
-            <a:pPr>
-              <a:spcAft>
-                <a:spcPts val="800"/>
-              </a:spcAft>
-              <a:defRPr sz="1600">
-                <a:solidFill>
-                  <a:srgbClr val="333333"/>
-                </a:solidFill>
-              </a:defRPr>
-            </a:pPr>
-            <a:r>
-              <a:t>• Informal workarounds mask severity of governance deficiencies</a:t>
+              <a:t>(HHS, Office for Civil Rights, 2023)</a:t>
             </a:r>
           </a:p>
         </p:txBody>
@@ -7764,7 +5107,7 @@
               </a:defRPr>
             </a:pPr>
             <a:r>
-              <a:t>Background of the Problem</a:t>
+              <a:t>Purpose &amp; Research Questions</a:t>
             </a:r>
           </a:p>
         </p:txBody>
@@ -7828,7 +5171,7 @@
           <a:p>
             <a:pPr>
               <a:spcAft>
-                <a:spcPts val="800"/>
+                <a:spcPts val="1000"/>
               </a:spcAft>
               <a:defRPr sz="1600">
                 <a:solidFill>
@@ -7837,13 +5180,13 @@
               </a:defRPr>
             </a:pPr>
             <a:r>
-              <a:t>• In 2023, healthcare data breaches affected 133+ million patients nationally</a:t>
+              <a:t>Purpose: Examine how IS governance failures at NP Clinic impact patient satisfaction measured through CG-CAHPS</a:t>
             </a:r>
           </a:p>
           <a:p>
             <a:pPr>
               <a:spcAft>
-                <a:spcPts val="800"/>
+                <a:spcPts val="1000"/>
               </a:spcAft>
               <a:defRPr sz="1600">
                 <a:solidFill>
@@ -7851,14 +5194,11 @@
                 </a:solidFill>
               </a:defRPr>
             </a:pPr>
-            <a:r>
-              <a:t>• Small, independent practices operate without dedicated IT staff or security budgets</a:t>
-            </a:r>
           </a:p>
           <a:p>
             <a:pPr>
               <a:spcAft>
-                <a:spcPts val="800"/>
+                <a:spcPts val="1000"/>
               </a:spcAft>
               <a:defRPr sz="1600">
                 <a:solidFill>
@@ -7867,13 +5207,13 @@
               </a:defRPr>
             </a:pPr>
             <a:r>
-              <a:t>• Emerging research links cybersecurity breaches to operational disruption</a:t>
+              <a:t>RQ1: How do staff characterize IS governance gaps and what prevents adoption of standards?</a:t>
             </a:r>
           </a:p>
           <a:p>
             <a:pPr>
               <a:spcAft>
-                <a:spcPts val="800"/>
+                <a:spcPts val="1000"/>
               </a:spcAft>
               <a:defRPr sz="1600">
                 <a:solidFill>
@@ -7881,14 +5221,11 @@
                 </a:solidFill>
               </a:defRPr>
             </a:pPr>
-            <a:r>
-              <a:t>• Hospital-centered literature has not examined this at small independent clinics</a:t>
-            </a:r>
           </a:p>
           <a:p>
             <a:pPr>
               <a:spcAft>
-                <a:spcPts val="800"/>
+                <a:spcPts val="1000"/>
               </a:spcAft>
               <a:defRPr sz="1600">
                 <a:solidFill>
@@ -7897,2017 +5234,7 @@
               </a:defRPr>
             </a:pPr>
             <a:r>
-              <a:t>• NP Clinic represents the setting where most Americans receive routine care</a:t>
-            </a:r>
-          </a:p>
-        </p:txBody>
-      </p:sp>
-      <p:sp>
-        <p:nvSpPr>
-          <p:cNvPr id="5" name="TextBox 4"/>
-          <p:cNvSpPr txBox="1"/>
-          <p:nvPr/>
-        </p:nvSpPr>
-        <p:spPr>
-          <a:xfrm>
-            <a:off x="640080" y="5943600"/>
-            <a:ext cx="8046720" cy="822960"/>
-          </a:xfrm>
-          <a:prstGeom prst="rect">
-            <a:avLst/>
-          </a:prstGeom>
-          <a:noFill/>
-        </p:spPr>
-        <p:txBody>
-          <a:bodyPr wrap="square">
-            <a:spAutoFit/>
-          </a:bodyPr>
-          <a:lstStyle/>
-          <a:p>
-            <a:pPr>
-              <a:defRPr sz="1000" i="1">
-                <a:solidFill>
-                  <a:srgbClr val="333333"/>
-                </a:solidFill>
-              </a:defRPr>
-            </a:pPr>
-            <a:r>
-              <a:t>(HHS, Office for Civil Rights, 2023; Choi et al., 2019)</a:t>
-            </a:r>
-          </a:p>
-        </p:txBody>
-      </p:sp>
-    </p:spTree>
-  </p:cSld>
-  <p:clrMapOvr>
-    <a:masterClrMapping/>
-  </p:clrMapOvr>
-</p:sld>
-</file>
-
-<file path=ppt/slides/slide30.xml><?xml version="1.0" encoding="utf-8"?>
-<p:sld xmlns:a="http://schemas.openxmlformats.org/drawingml/2006/main" xmlns:p="http://schemas.openxmlformats.org/presentationml/2006/main" xmlns:r="http://schemas.openxmlformats.org/officeDocument/2006/relationships">
-  <p:cSld>
-    <p:bg>
-      <p:bgPr>
-        <a:solidFill>
-          <a:srgbClr val="FFFFFF"/>
-        </a:solidFill>
-        <a:effectLst/>
-      </p:bgPr>
-    </p:bg>
-    <p:spTree>
-      <p:nvGrpSpPr>
-        <p:cNvPr id="1" name=""/>
-        <p:cNvGrpSpPr/>
-        <p:nvPr/>
-      </p:nvGrpSpPr>
-      <p:grpSpPr/>
-      <p:sp>
-        <p:nvSpPr>
-          <p:cNvPr id="2" name="TextBox 1"/>
-          <p:cNvSpPr txBox="1"/>
-          <p:nvPr/>
-        </p:nvSpPr>
-        <p:spPr>
-          <a:xfrm>
-            <a:off x="457200" y="365760"/>
-            <a:ext cx="8229600" cy="548640"/>
-          </a:xfrm>
-          <a:prstGeom prst="rect">
-            <a:avLst/>
-          </a:prstGeom>
-          <a:noFill/>
-        </p:spPr>
-        <p:txBody>
-          <a:bodyPr wrap="square">
-            <a:spAutoFit/>
-          </a:bodyPr>
-          <a:lstStyle/>
-          <a:p>
-            <a:pPr>
-              <a:defRPr sz="2800" b="1">
-                <a:solidFill>
-                  <a:srgbClr val="1B3A6B"/>
-                </a:solidFill>
-              </a:defRPr>
-            </a:pPr>
-            <a:r>
-              <a:t>Discussion: Governance Impact on Patient Experience</a:t>
-            </a:r>
-          </a:p>
-        </p:txBody>
-      </p:sp>
-      <p:cxnSp>
-        <p:nvCxnSpPr>
-          <p:cNvPr id="3" name="Connector 2"/>
-          <p:cNvCxnSpPr/>
-          <p:nvPr/>
-        </p:nvCxnSpPr>
-        <p:spPr>
-          <a:xfrm>
-            <a:off x="457200" y="1005840"/>
-            <a:ext cx="8229600" cy="0"/>
-          </a:xfrm>
-          <a:prstGeom prst="line">
-            <a:avLst/>
-          </a:prstGeom>
-          <a:ln w="25400">
-            <a:solidFill>
-              <a:srgbClr val="4A90E2"/>
-            </a:solidFill>
-          </a:ln>
-        </p:spPr>
-        <p:style>
-          <a:lnRef idx="2">
-            <a:schemeClr val="accent1"/>
-          </a:lnRef>
-          <a:fillRef idx="0">
-            <a:schemeClr val="accent1"/>
-          </a:fillRef>
-          <a:effectRef idx="1">
-            <a:schemeClr val="accent1"/>
-          </a:effectRef>
-          <a:fontRef idx="minor">
-            <a:schemeClr val="tx1"/>
-          </a:fontRef>
-        </p:style>
-      </p:cxnSp>
-      <p:sp>
-        <p:nvSpPr>
-          <p:cNvPr id="4" name="TextBox 3"/>
-          <p:cNvSpPr txBox="1"/>
-          <p:nvPr/>
-        </p:nvSpPr>
-        <p:spPr>
-          <a:xfrm>
-            <a:off x="640080" y="1234440"/>
-            <a:ext cx="8046720" cy="4754880"/>
-          </a:xfrm>
-          <a:prstGeom prst="rect">
-            <a:avLst/>
-          </a:prstGeom>
-          <a:noFill/>
-        </p:spPr>
-        <p:txBody>
-          <a:bodyPr wrap="square">
-            <a:spAutoFit/>
-          </a:bodyPr>
-          <a:lstStyle/>
-          <a:p>
-            <a:pPr>
-              <a:spcAft>
-                <a:spcPts val="800"/>
-              </a:spcAft>
-              <a:defRPr sz="1600">
-                <a:solidFill>
-                  <a:srgbClr val="333333"/>
-                </a:solidFill>
-              </a:defRPr>
-            </a:pPr>
-            <a:r>
-              <a:t>• RQ2 examined clinical staff perceptions of cybersecurity impact on patient experience</a:t>
-            </a:r>
-          </a:p>
-          <a:p>
-            <a:pPr>
-              <a:spcAft>
-                <a:spcPts val="800"/>
-              </a:spcAft>
-              <a:defRPr sz="1600">
-                <a:solidFill>
-                  <a:srgbClr val="333333"/>
-                </a:solidFill>
-              </a:defRPr>
-            </a:pPr>
-            <a:r>
-              <a:t>• Technology disruptions create immediate workflow barriers for clinical staff</a:t>
-            </a:r>
-          </a:p>
-          <a:p>
-            <a:pPr>
-              <a:spcAft>
-                <a:spcPts val="800"/>
-              </a:spcAft>
-              <a:defRPr sz="1600">
-                <a:solidFill>
-                  <a:srgbClr val="333333"/>
-                </a:solidFill>
-              </a:defRPr>
-            </a:pPr>
-            <a:r>
-              <a:t>• Staff report observable patient frustration during outages and scheduling delays</a:t>
-            </a:r>
-          </a:p>
-          <a:p>
-            <a:pPr>
-              <a:spcAft>
-                <a:spcPts val="800"/>
-              </a:spcAft>
-              <a:defRPr sz="1600">
-                <a:solidFill>
-                  <a:srgbClr val="333333"/>
-                </a:solidFill>
-              </a:defRPr>
-            </a:pPr>
-            <a:r>
-              <a:t>• Workarounds consume time that would otherwise go to patient care</a:t>
-            </a:r>
-          </a:p>
-          <a:p>
-            <a:pPr>
-              <a:spcAft>
-                <a:spcPts val="800"/>
-              </a:spcAft>
-              <a:defRPr sz="1600">
-                <a:solidFill>
-                  <a:srgbClr val="333333"/>
-                </a:solidFill>
-              </a:defRPr>
-            </a:pPr>
-            <a:r>
-              <a:t>• Patient satisfaction likely affected through increased wait times, communication delays</a:t>
-            </a:r>
-          </a:p>
-        </p:txBody>
-      </p:sp>
-    </p:spTree>
-  </p:cSld>
-  <p:clrMapOvr>
-    <a:masterClrMapping/>
-  </p:clrMapOvr>
-</p:sld>
-</file>
-
-<file path=ppt/slides/slide31.xml><?xml version="1.0" encoding="utf-8"?>
-<p:sld xmlns:a="http://schemas.openxmlformats.org/drawingml/2006/main" xmlns:p="http://schemas.openxmlformats.org/presentationml/2006/main" xmlns:r="http://schemas.openxmlformats.org/officeDocument/2006/relationships">
-  <p:cSld>
-    <p:bg>
-      <p:bgPr>
-        <a:solidFill>
-          <a:srgbClr val="FFFFFF"/>
-        </a:solidFill>
-        <a:effectLst/>
-      </p:bgPr>
-    </p:bg>
-    <p:spTree>
-      <p:nvGrpSpPr>
-        <p:cNvPr id="1" name=""/>
-        <p:cNvGrpSpPr/>
-        <p:nvPr/>
-      </p:nvGrpSpPr>
-      <p:grpSpPr/>
-      <p:sp>
-        <p:nvSpPr>
-          <p:cNvPr id="2" name="TextBox 1"/>
-          <p:cNvSpPr txBox="1"/>
-          <p:nvPr/>
-        </p:nvSpPr>
-        <p:spPr>
-          <a:xfrm>
-            <a:off x="457200" y="365760"/>
-            <a:ext cx="8229600" cy="548640"/>
-          </a:xfrm>
-          <a:prstGeom prst="rect">
-            <a:avLst/>
-          </a:prstGeom>
-          <a:noFill/>
-        </p:spPr>
-        <p:txBody>
-          <a:bodyPr wrap="square">
-            <a:spAutoFit/>
-          </a:bodyPr>
-          <a:lstStyle/>
-          <a:p>
-            <a:pPr>
-              <a:defRPr sz="2800" b="1">
-                <a:solidFill>
-                  <a:srgbClr val="1B3A6B"/>
-                </a:solidFill>
-              </a:defRPr>
-            </a:pPr>
-            <a:r>
-              <a:t>How Findings Connect to Literature</a:t>
-            </a:r>
-          </a:p>
-        </p:txBody>
-      </p:sp>
-      <p:cxnSp>
-        <p:nvCxnSpPr>
-          <p:cNvPr id="3" name="Connector 2"/>
-          <p:cNvCxnSpPr/>
-          <p:nvPr/>
-        </p:nvCxnSpPr>
-        <p:spPr>
-          <a:xfrm>
-            <a:off x="457200" y="1005840"/>
-            <a:ext cx="8229600" cy="0"/>
-          </a:xfrm>
-          <a:prstGeom prst="line">
-            <a:avLst/>
-          </a:prstGeom>
-          <a:ln w="25400">
-            <a:solidFill>
-              <a:srgbClr val="4A90E2"/>
-            </a:solidFill>
-          </a:ln>
-        </p:spPr>
-        <p:style>
-          <a:lnRef idx="2">
-            <a:schemeClr val="accent1"/>
-          </a:lnRef>
-          <a:fillRef idx="0">
-            <a:schemeClr val="accent1"/>
-          </a:fillRef>
-          <a:effectRef idx="1">
-            <a:schemeClr val="accent1"/>
-          </a:effectRef>
-          <a:fontRef idx="minor">
-            <a:schemeClr val="tx1"/>
-          </a:fontRef>
-        </p:style>
-      </p:cxnSp>
-      <p:sp>
-        <p:nvSpPr>
-          <p:cNvPr id="4" name="TextBox 3"/>
-          <p:cNvSpPr txBox="1"/>
-          <p:nvPr/>
-        </p:nvSpPr>
-        <p:spPr>
-          <a:xfrm>
-            <a:off x="640080" y="1234440"/>
-            <a:ext cx="8046720" cy="4754880"/>
-          </a:xfrm>
-          <a:prstGeom prst="rect">
-            <a:avLst/>
-          </a:prstGeom>
-          <a:noFill/>
-        </p:spPr>
-        <p:txBody>
-          <a:bodyPr wrap="square">
-            <a:spAutoFit/>
-          </a:bodyPr>
-          <a:lstStyle/>
-          <a:p>
-            <a:pPr>
-              <a:spcAft>
-                <a:spcPts val="800"/>
-              </a:spcAft>
-              <a:defRPr sz="1600">
-                <a:solidFill>
-                  <a:srgbClr val="333333"/>
-                </a:solidFill>
-              </a:defRPr>
-            </a:pPr>
-            <a:r>
-              <a:t>• Supports hospital evidence: Governance gaps lead to operational disruption</a:t>
-            </a:r>
-          </a:p>
-          <a:p>
-            <a:pPr>
-              <a:spcAft>
-                <a:spcPts val="800"/>
-              </a:spcAft>
-              <a:defRPr sz="1600">
-                <a:solidFill>
-                  <a:srgbClr val="333333"/>
-                </a:solidFill>
-              </a:defRPr>
-            </a:pPr>
-            <a:r>
-              <a:t>• Organizational resilience theory explains adaptation through informal workarounds</a:t>
-            </a:r>
-          </a:p>
-          <a:p>
-            <a:pPr>
-              <a:spcAft>
-                <a:spcPts val="800"/>
-              </a:spcAft>
-              <a:defRPr sz="1600">
-                <a:solidFill>
-                  <a:srgbClr val="333333"/>
-                </a:solidFill>
-              </a:defRPr>
-            </a:pPr>
-            <a:r>
-              <a:t>• Nifakos et al. finding on organizational culture resonates at clinic scale</a:t>
-            </a:r>
-          </a:p>
-          <a:p>
-            <a:pPr>
-              <a:spcAft>
-                <a:spcPts val="800"/>
-              </a:spcAft>
-              <a:defRPr sz="1600">
-                <a:solidFill>
-                  <a:srgbClr val="333333"/>
-                </a:solidFill>
-              </a:defRPr>
-            </a:pPr>
-            <a:r>
-              <a:t>• Alanazi findings on time/resource constraints confirmed at small practice scale</a:t>
-            </a:r>
-          </a:p>
-          <a:p>
-            <a:pPr>
-              <a:spcAft>
-                <a:spcPts val="800"/>
-              </a:spcAft>
-              <a:defRPr sz="1600">
-                <a:solidFill>
-                  <a:srgbClr val="333333"/>
-                </a:solidFill>
-              </a:defRPr>
-            </a:pPr>
-            <a:r>
-              <a:t>• CG-CAHPS domains directly affected by disruptions documented here</a:t>
-            </a:r>
-          </a:p>
-        </p:txBody>
-      </p:sp>
-      <p:sp>
-        <p:nvSpPr>
-          <p:cNvPr id="5" name="TextBox 4"/>
-          <p:cNvSpPr txBox="1"/>
-          <p:nvPr/>
-        </p:nvSpPr>
-        <p:spPr>
-          <a:xfrm>
-            <a:off x="640080" y="5943600"/>
-            <a:ext cx="8046720" cy="822960"/>
-          </a:xfrm>
-          <a:prstGeom prst="rect">
-            <a:avLst/>
-          </a:prstGeom>
-          <a:noFill/>
-        </p:spPr>
-        <p:txBody>
-          <a:bodyPr wrap="square">
-            <a:spAutoFit/>
-          </a:bodyPr>
-          <a:lstStyle/>
-          <a:p>
-            <a:pPr>
-              <a:defRPr sz="1000" i="1">
-                <a:solidFill>
-                  <a:srgbClr val="333333"/>
-                </a:solidFill>
-              </a:defRPr>
-            </a:pPr>
-            <a:r>
-              <a:t>(Nifakos et al., 2021; Alanazi, 2023)</a:t>
-            </a:r>
-          </a:p>
-        </p:txBody>
-      </p:sp>
-    </p:spTree>
-  </p:cSld>
-  <p:clrMapOvr>
-    <a:masterClrMapping/>
-  </p:clrMapOvr>
-</p:sld>
-</file>
-
-<file path=ppt/slides/slide32.xml><?xml version="1.0" encoding="utf-8"?>
-<p:sld xmlns:a="http://schemas.openxmlformats.org/drawingml/2006/main" xmlns:p="http://schemas.openxmlformats.org/presentationml/2006/main" xmlns:r="http://schemas.openxmlformats.org/officeDocument/2006/relationships">
-  <p:cSld>
-    <p:bg>
-      <p:bgPr>
-        <a:solidFill>
-          <a:srgbClr val="FFFFFF"/>
-        </a:solidFill>
-        <a:effectLst/>
-      </p:bgPr>
-    </p:bg>
-    <p:spTree>
-      <p:nvGrpSpPr>
-        <p:cNvPr id="1" name=""/>
-        <p:cNvGrpSpPr/>
-        <p:nvPr/>
-      </p:nvGrpSpPr>
-      <p:grpSpPr/>
-      <p:sp>
-        <p:nvSpPr>
-          <p:cNvPr id="2" name="TextBox 1"/>
-          <p:cNvSpPr txBox="1"/>
-          <p:nvPr/>
-        </p:nvSpPr>
-        <p:spPr>
-          <a:xfrm>
-            <a:off x="457200" y="365760"/>
-            <a:ext cx="8229600" cy="548640"/>
-          </a:xfrm>
-          <a:prstGeom prst="rect">
-            <a:avLst/>
-          </a:prstGeom>
-          <a:noFill/>
-        </p:spPr>
-        <p:txBody>
-          <a:bodyPr wrap="square">
-            <a:spAutoFit/>
-          </a:bodyPr>
-          <a:lstStyle/>
-          <a:p>
-            <a:pPr>
-              <a:defRPr sz="2800" b="1">
-                <a:solidFill>
-                  <a:srgbClr val="1B3A6B"/>
-                </a:solidFill>
-              </a:defRPr>
-            </a:pPr>
-            <a:r>
-              <a:t>Implications for Small Practice Management</a:t>
-            </a:r>
-          </a:p>
-        </p:txBody>
-      </p:sp>
-      <p:cxnSp>
-        <p:nvCxnSpPr>
-          <p:cNvPr id="3" name="Connector 2"/>
-          <p:cNvCxnSpPr/>
-          <p:nvPr/>
-        </p:nvCxnSpPr>
-        <p:spPr>
-          <a:xfrm>
-            <a:off x="457200" y="1005840"/>
-            <a:ext cx="8229600" cy="0"/>
-          </a:xfrm>
-          <a:prstGeom prst="line">
-            <a:avLst/>
-          </a:prstGeom>
-          <a:ln w="25400">
-            <a:solidFill>
-              <a:srgbClr val="4A90E2"/>
-            </a:solidFill>
-          </a:ln>
-        </p:spPr>
-        <p:style>
-          <a:lnRef idx="2">
-            <a:schemeClr val="accent1"/>
-          </a:lnRef>
-          <a:fillRef idx="0">
-            <a:schemeClr val="accent1"/>
-          </a:fillRef>
-          <a:effectRef idx="1">
-            <a:schemeClr val="accent1"/>
-          </a:effectRef>
-          <a:fontRef idx="minor">
-            <a:schemeClr val="tx1"/>
-          </a:fontRef>
-        </p:style>
-      </p:cxnSp>
-      <p:sp>
-        <p:nvSpPr>
-          <p:cNvPr id="4" name="TextBox 3"/>
-          <p:cNvSpPr txBox="1"/>
-          <p:nvPr/>
-        </p:nvSpPr>
-        <p:spPr>
-          <a:xfrm>
-            <a:off x="640080" y="1234440"/>
-            <a:ext cx="8046720" cy="4754880"/>
-          </a:xfrm>
-          <a:prstGeom prst="rect">
-            <a:avLst/>
-          </a:prstGeom>
-          <a:noFill/>
-        </p:spPr>
-        <p:txBody>
-          <a:bodyPr wrap="square">
-            <a:spAutoFit/>
-          </a:bodyPr>
-          <a:lstStyle/>
-          <a:p>
-            <a:pPr>
-              <a:spcAft>
-                <a:spcPts val="800"/>
-              </a:spcAft>
-              <a:defRPr sz="1600">
-                <a:solidFill>
-                  <a:srgbClr val="333333"/>
-                </a:solidFill>
-              </a:defRPr>
-            </a:pPr>
-            <a:r>
-              <a:t>• Small practices need guidance calibrated explicitly to resource constraints</a:t>
-            </a:r>
-          </a:p>
-          <a:p>
-            <a:pPr>
-              <a:spcAft>
-                <a:spcPts val="800"/>
-              </a:spcAft>
-              <a:defRPr sz="1600">
-                <a:solidFill>
-                  <a:srgbClr val="333333"/>
-                </a:solidFill>
-              </a:defRPr>
-            </a:pPr>
-            <a:r>
-              <a:t>• HICP provides realistic framework; full NIST adoption not feasible</a:t>
-            </a:r>
-          </a:p>
-          <a:p>
-            <a:pPr>
-              <a:spcAft>
-                <a:spcPts val="800"/>
-              </a:spcAft>
-              <a:defRPr sz="1600">
-                <a:solidFill>
-                  <a:srgbClr val="333333"/>
-                </a:solidFill>
-              </a:defRPr>
-            </a:pPr>
-            <a:r>
-              <a:t>• Security awareness must start with practice owner and extend to all staff</a:t>
-            </a:r>
-          </a:p>
-          <a:p>
-            <a:pPr>
-              <a:spcAft>
-                <a:spcPts val="800"/>
-              </a:spcAft>
-              <a:defRPr sz="1600">
-                <a:solidFill>
-                  <a:srgbClr val="333333"/>
-                </a:solidFill>
-              </a:defRPr>
-            </a:pPr>
-            <a:r>
-              <a:t>• Incident response planning should fit small-team workflows and realities</a:t>
-            </a:r>
-          </a:p>
-          <a:p>
-            <a:pPr>
-              <a:spcAft>
-                <a:spcPts val="800"/>
-              </a:spcAft>
-              <a:defRPr sz="1600">
-                <a:solidFill>
-                  <a:srgbClr val="333333"/>
-                </a:solidFill>
-              </a:defRPr>
-            </a:pPr>
-            <a:r>
-              <a:t>• Vendor relationships must include explicit security expectations and oversight</a:t>
-            </a:r>
-          </a:p>
-        </p:txBody>
-      </p:sp>
-    </p:spTree>
-  </p:cSld>
-  <p:clrMapOvr>
-    <a:masterClrMapping/>
-  </p:clrMapOvr>
-</p:sld>
-</file>
-
-<file path=ppt/slides/slide33.xml><?xml version="1.0" encoding="utf-8"?>
-<p:sld xmlns:a="http://schemas.openxmlformats.org/drawingml/2006/main" xmlns:p="http://schemas.openxmlformats.org/presentationml/2006/main" xmlns:r="http://schemas.openxmlformats.org/officeDocument/2006/relationships">
-  <p:cSld>
-    <p:bg>
-      <p:bgPr>
-        <a:solidFill>
-          <a:srgbClr val="FFFFFF"/>
-        </a:solidFill>
-        <a:effectLst/>
-      </p:bgPr>
-    </p:bg>
-    <p:spTree>
-      <p:nvGrpSpPr>
-        <p:cNvPr id="1" name=""/>
-        <p:cNvGrpSpPr/>
-        <p:nvPr/>
-      </p:nvGrpSpPr>
-      <p:grpSpPr/>
-      <p:sp>
-        <p:nvSpPr>
-          <p:cNvPr id="2" name="TextBox 1"/>
-          <p:cNvSpPr txBox="1"/>
-          <p:nvPr/>
-        </p:nvSpPr>
-        <p:spPr>
-          <a:xfrm>
-            <a:off x="457200" y="365760"/>
-            <a:ext cx="8229600" cy="548640"/>
-          </a:xfrm>
-          <a:prstGeom prst="rect">
-            <a:avLst/>
-          </a:prstGeom>
-          <a:noFill/>
-        </p:spPr>
-        <p:txBody>
-          <a:bodyPr wrap="square">
-            <a:spAutoFit/>
-          </a:bodyPr>
-          <a:lstStyle/>
-          <a:p>
-            <a:pPr>
-              <a:defRPr sz="2800" b="1">
-                <a:solidFill>
-                  <a:srgbClr val="1B3A6B"/>
-                </a:solidFill>
-              </a:defRPr>
-            </a:pPr>
-            <a:r>
-              <a:t>Implications for Research</a:t>
-            </a:r>
-          </a:p>
-        </p:txBody>
-      </p:sp>
-      <p:cxnSp>
-        <p:nvCxnSpPr>
-          <p:cNvPr id="3" name="Connector 2"/>
-          <p:cNvCxnSpPr/>
-          <p:nvPr/>
-        </p:nvCxnSpPr>
-        <p:spPr>
-          <a:xfrm>
-            <a:off x="457200" y="1005840"/>
-            <a:ext cx="8229600" cy="0"/>
-          </a:xfrm>
-          <a:prstGeom prst="line">
-            <a:avLst/>
-          </a:prstGeom>
-          <a:ln w="25400">
-            <a:solidFill>
-              <a:srgbClr val="4A90E2"/>
-            </a:solidFill>
-          </a:ln>
-        </p:spPr>
-        <p:style>
-          <a:lnRef idx="2">
-            <a:schemeClr val="accent1"/>
-          </a:lnRef>
-          <a:fillRef idx="0">
-            <a:schemeClr val="accent1"/>
-          </a:fillRef>
-          <a:effectRef idx="1">
-            <a:schemeClr val="accent1"/>
-          </a:effectRef>
-          <a:fontRef idx="minor">
-            <a:schemeClr val="tx1"/>
-          </a:fontRef>
-        </p:style>
-      </p:cxnSp>
-      <p:sp>
-        <p:nvSpPr>
-          <p:cNvPr id="4" name="TextBox 3"/>
-          <p:cNvSpPr txBox="1"/>
-          <p:nvPr/>
-        </p:nvSpPr>
-        <p:spPr>
-          <a:xfrm>
-            <a:off x="640080" y="1234440"/>
-            <a:ext cx="8046720" cy="4754880"/>
-          </a:xfrm>
-          <a:prstGeom prst="rect">
-            <a:avLst/>
-          </a:prstGeom>
-          <a:noFill/>
-        </p:spPr>
-        <p:txBody>
-          <a:bodyPr wrap="square">
-            <a:spAutoFit/>
-          </a:bodyPr>
-          <a:lstStyle/>
-          <a:p>
-            <a:pPr>
-              <a:spcAft>
-                <a:spcPts val="800"/>
-              </a:spcAft>
-              <a:defRPr sz="1600">
-                <a:solidFill>
-                  <a:srgbClr val="333333"/>
-                </a:solidFill>
-              </a:defRPr>
-            </a:pPr>
-            <a:r>
-              <a:t>• Hospital-centric literature must expand to include outpatient settings</a:t>
-            </a:r>
-          </a:p>
-          <a:p>
-            <a:pPr>
-              <a:spcAft>
-                <a:spcPts val="800"/>
-              </a:spcAft>
-              <a:defRPr sz="1600">
-                <a:solidFill>
-                  <a:srgbClr val="333333"/>
-                </a:solidFill>
-              </a:defRPr>
-            </a:pPr>
-            <a:r>
-              <a:t>• CG-CAHPS should be examined as outcome measure in governance studies</a:t>
-            </a:r>
-          </a:p>
-          <a:p>
-            <a:pPr>
-              <a:spcAft>
-                <a:spcPts val="800"/>
-              </a:spcAft>
-              <a:defRPr sz="1600">
-                <a:solidFill>
-                  <a:srgbClr val="333333"/>
-                </a:solidFill>
-              </a:defRPr>
-            </a:pPr>
-            <a:r>
-              <a:t>• Organizational culture at small practices deserves dedicated research attention</a:t>
-            </a:r>
-          </a:p>
-          <a:p>
-            <a:pPr>
-              <a:spcAft>
-                <a:spcPts val="800"/>
-              </a:spcAft>
-              <a:defRPr sz="1600">
-                <a:solidFill>
-                  <a:srgbClr val="333333"/>
-                </a:solidFill>
-              </a:defRPr>
-            </a:pPr>
-            <a:r>
-              <a:t>• Qualitative methods reveal mechanisms missed by quantitative breach studies</a:t>
-            </a:r>
-          </a:p>
-          <a:p>
-            <a:pPr>
-              <a:spcAft>
-                <a:spcPts val="800"/>
-              </a:spcAft>
-              <a:defRPr sz="1600">
-                <a:solidFill>
-                  <a:srgbClr val="333333"/>
-                </a:solidFill>
-              </a:defRPr>
-            </a:pPr>
-            <a:r>
-              <a:t>• Human factors often outweigh technical controls in resource-constrained settings</a:t>
-            </a:r>
-          </a:p>
-        </p:txBody>
-      </p:sp>
-    </p:spTree>
-  </p:cSld>
-  <p:clrMapOvr>
-    <a:masterClrMapping/>
-  </p:clrMapOvr>
-</p:sld>
-</file>
-
-<file path=ppt/slides/slide34.xml><?xml version="1.0" encoding="utf-8"?>
-<p:sld xmlns:a="http://schemas.openxmlformats.org/drawingml/2006/main" xmlns:p="http://schemas.openxmlformats.org/presentationml/2006/main" xmlns:r="http://schemas.openxmlformats.org/officeDocument/2006/relationships">
-  <p:cSld>
-    <p:bg>
-      <p:bgPr>
-        <a:solidFill>
-          <a:srgbClr val="FFFFFF"/>
-        </a:solidFill>
-        <a:effectLst/>
-      </p:bgPr>
-    </p:bg>
-    <p:spTree>
-      <p:nvGrpSpPr>
-        <p:cNvPr id="1" name=""/>
-        <p:cNvGrpSpPr/>
-        <p:nvPr/>
-      </p:nvGrpSpPr>
-      <p:grpSpPr/>
-      <p:sp>
-        <p:nvSpPr>
-          <p:cNvPr id="2" name="TextBox 1"/>
-          <p:cNvSpPr txBox="1"/>
-          <p:nvPr/>
-        </p:nvSpPr>
-        <p:spPr>
-          <a:xfrm>
-            <a:off x="457200" y="365760"/>
-            <a:ext cx="8229600" cy="548640"/>
-          </a:xfrm>
-          <a:prstGeom prst="rect">
-            <a:avLst/>
-          </a:prstGeom>
-          <a:noFill/>
-        </p:spPr>
-        <p:txBody>
-          <a:bodyPr wrap="square">
-            <a:spAutoFit/>
-          </a:bodyPr>
-          <a:lstStyle/>
-          <a:p>
-            <a:pPr>
-              <a:defRPr sz="2800" b="1">
-                <a:solidFill>
-                  <a:srgbClr val="1B3A6B"/>
-                </a:solidFill>
-              </a:defRPr>
-            </a:pPr>
-            <a:r>
-              <a:t>Implications for Regulation and Policy</a:t>
-            </a:r>
-          </a:p>
-        </p:txBody>
-      </p:sp>
-      <p:cxnSp>
-        <p:nvCxnSpPr>
-          <p:cNvPr id="3" name="Connector 2"/>
-          <p:cNvCxnSpPr/>
-          <p:nvPr/>
-        </p:nvCxnSpPr>
-        <p:spPr>
-          <a:xfrm>
-            <a:off x="457200" y="1005840"/>
-            <a:ext cx="8229600" cy="0"/>
-          </a:xfrm>
-          <a:prstGeom prst="line">
-            <a:avLst/>
-          </a:prstGeom>
-          <a:ln w="25400">
-            <a:solidFill>
-              <a:srgbClr val="4A90E2"/>
-            </a:solidFill>
-          </a:ln>
-        </p:spPr>
-        <p:style>
-          <a:lnRef idx="2">
-            <a:schemeClr val="accent1"/>
-          </a:lnRef>
-          <a:fillRef idx="0">
-            <a:schemeClr val="accent1"/>
-          </a:fillRef>
-          <a:effectRef idx="1">
-            <a:schemeClr val="accent1"/>
-          </a:effectRef>
-          <a:fontRef idx="minor">
-            <a:schemeClr val="tx1"/>
-          </a:fontRef>
-        </p:style>
-      </p:cxnSp>
-      <p:sp>
-        <p:nvSpPr>
-          <p:cNvPr id="4" name="TextBox 3"/>
-          <p:cNvSpPr txBox="1"/>
-          <p:nvPr/>
-        </p:nvSpPr>
-        <p:spPr>
-          <a:xfrm>
-            <a:off x="640080" y="1234440"/>
-            <a:ext cx="8046720" cy="4754880"/>
-          </a:xfrm>
-          <a:prstGeom prst="rect">
-            <a:avLst/>
-          </a:prstGeom>
-          <a:noFill/>
-        </p:spPr>
-        <p:txBody>
-          <a:bodyPr wrap="square">
-            <a:spAutoFit/>
-          </a:bodyPr>
-          <a:lstStyle/>
-          <a:p>
-            <a:pPr>
-              <a:spcAft>
-                <a:spcPts val="800"/>
-              </a:spcAft>
-              <a:defRPr sz="1600">
-                <a:solidFill>
-                  <a:srgbClr val="333333"/>
-                </a:solidFill>
-              </a:defRPr>
-            </a:pPr>
-            <a:r>
-              <a:t>• HIPAA Security Rule applies uniformly, but technical assistance must scale</a:t>
-            </a:r>
-          </a:p>
-          <a:p>
-            <a:pPr>
-              <a:spcAft>
-                <a:spcPts val="800"/>
-              </a:spcAft>
-              <a:defRPr sz="1600">
-                <a:solidFill>
-                  <a:srgbClr val="333333"/>
-                </a:solidFill>
-              </a:defRPr>
-            </a:pPr>
-            <a:r>
-              <a:t>• Regulators should consider safe harbor provisions for small independent practices</a:t>
-            </a:r>
-          </a:p>
-          <a:p>
-            <a:pPr>
-              <a:spcAft>
-                <a:spcPts val="800"/>
-              </a:spcAft>
-              <a:defRPr sz="1600">
-                <a:solidFill>
-                  <a:srgbClr val="333333"/>
-                </a:solidFill>
-              </a:defRPr>
-            </a:pPr>
-            <a:r>
-              <a:t>• Professional associations should develop small-practice-specific guidance</a:t>
-            </a:r>
-          </a:p>
-          <a:p>
-            <a:pPr>
-              <a:spcAft>
-                <a:spcPts val="800"/>
-              </a:spcAft>
-              <a:defRPr sz="1600">
-                <a:solidFill>
-                  <a:srgbClr val="333333"/>
-                </a:solidFill>
-              </a:defRPr>
-            </a:pPr>
-            <a:r>
-              <a:t>• Cybersecurity expectations must acknowledge organizational capacity limitations</a:t>
-            </a:r>
-          </a:p>
-          <a:p>
-            <a:pPr>
-              <a:spcAft>
-                <a:spcPts val="800"/>
-              </a:spcAft>
-              <a:defRPr sz="1600">
-                <a:solidFill>
-                  <a:srgbClr val="333333"/>
-                </a:solidFill>
-              </a:defRPr>
-            </a:pPr>
-            <a:r>
-              <a:t>• Support infrastructure (templates, training, technical assistance) needed</a:t>
-            </a:r>
-          </a:p>
-        </p:txBody>
-      </p:sp>
-    </p:spTree>
-  </p:cSld>
-  <p:clrMapOvr>
-    <a:masterClrMapping/>
-  </p:clrMapOvr>
-</p:sld>
-</file>
-
-<file path=ppt/slides/slide35.xml><?xml version="1.0" encoding="utf-8"?>
-<p:sld xmlns:a="http://schemas.openxmlformats.org/drawingml/2006/main" xmlns:p="http://schemas.openxmlformats.org/presentationml/2006/main" xmlns:r="http://schemas.openxmlformats.org/officeDocument/2006/relationships">
-  <p:cSld>
-    <p:bg>
-      <p:bgPr>
-        <a:solidFill>
-          <a:srgbClr val="FFFFFF"/>
-        </a:solidFill>
-        <a:effectLst/>
-      </p:bgPr>
-    </p:bg>
-    <p:spTree>
-      <p:nvGrpSpPr>
-        <p:cNvPr id="1" name=""/>
-        <p:cNvGrpSpPr/>
-        <p:nvPr/>
-      </p:nvGrpSpPr>
-      <p:grpSpPr/>
-      <p:sp>
-        <p:nvSpPr>
-          <p:cNvPr id="2" name="TextBox 1"/>
-          <p:cNvSpPr txBox="1"/>
-          <p:nvPr/>
-        </p:nvSpPr>
-        <p:spPr>
-          <a:xfrm>
-            <a:off x="457200" y="365760"/>
-            <a:ext cx="8229600" cy="548640"/>
-          </a:xfrm>
-          <a:prstGeom prst="rect">
-            <a:avLst/>
-          </a:prstGeom>
-          <a:noFill/>
-        </p:spPr>
-        <p:txBody>
-          <a:bodyPr wrap="square">
-            <a:spAutoFit/>
-          </a:bodyPr>
-          <a:lstStyle/>
-          <a:p>
-            <a:pPr>
-              <a:defRPr sz="2800" b="1">
-                <a:solidFill>
-                  <a:srgbClr val="1B3A6B"/>
-                </a:solidFill>
-              </a:defRPr>
-            </a:pPr>
-            <a:r>
-              <a:t>Recommendations for NP Clinic</a:t>
-            </a:r>
-          </a:p>
-        </p:txBody>
-      </p:sp>
-      <p:cxnSp>
-        <p:nvCxnSpPr>
-          <p:cNvPr id="3" name="Connector 2"/>
-          <p:cNvCxnSpPr/>
-          <p:nvPr/>
-        </p:nvCxnSpPr>
-        <p:spPr>
-          <a:xfrm>
-            <a:off x="457200" y="1005840"/>
-            <a:ext cx="8229600" cy="0"/>
-          </a:xfrm>
-          <a:prstGeom prst="line">
-            <a:avLst/>
-          </a:prstGeom>
-          <a:ln w="25400">
-            <a:solidFill>
-              <a:srgbClr val="4A90E2"/>
-            </a:solidFill>
-          </a:ln>
-        </p:spPr>
-        <p:style>
-          <a:lnRef idx="2">
-            <a:schemeClr val="accent1"/>
-          </a:lnRef>
-          <a:fillRef idx="0">
-            <a:schemeClr val="accent1"/>
-          </a:fillRef>
-          <a:effectRef idx="1">
-            <a:schemeClr val="accent1"/>
-          </a:effectRef>
-          <a:fontRef idx="minor">
-            <a:schemeClr val="tx1"/>
-          </a:fontRef>
-        </p:style>
-      </p:cxnSp>
-      <p:sp>
-        <p:nvSpPr>
-          <p:cNvPr id="4" name="TextBox 3"/>
-          <p:cNvSpPr txBox="1"/>
-          <p:nvPr/>
-        </p:nvSpPr>
-        <p:spPr>
-          <a:xfrm>
-            <a:off x="640080" y="1234440"/>
-            <a:ext cx="8046720" cy="4754880"/>
-          </a:xfrm>
-          <a:prstGeom prst="rect">
-            <a:avLst/>
-          </a:prstGeom>
-          <a:noFill/>
-        </p:spPr>
-        <p:txBody>
-          <a:bodyPr wrap="square">
-            <a:spAutoFit/>
-          </a:bodyPr>
-          <a:lstStyle/>
-          <a:p>
-            <a:pPr>
-              <a:spcAft>
-                <a:spcPts val="800"/>
-              </a:spcAft>
-              <a:defRPr sz="1600">
-                <a:solidFill>
-                  <a:srgbClr val="333333"/>
-                </a:solidFill>
-              </a:defRPr>
-            </a:pPr>
-            <a:r>
-              <a:t>• Immediate: Document current practices and formalize incident response workflow</a:t>
-            </a:r>
-          </a:p>
-          <a:p>
-            <a:pPr>
-              <a:spcAft>
-                <a:spcPts val="800"/>
-              </a:spcAft>
-              <a:defRPr sz="1600">
-                <a:solidFill>
-                  <a:srgbClr val="333333"/>
-                </a:solidFill>
-              </a:defRPr>
-            </a:pPr>
-            <a:r>
-              <a:t>• Near-term: Adopt HICP small-organization tier as governance baseline</a:t>
-            </a:r>
-          </a:p>
-          <a:p>
-            <a:pPr>
-              <a:spcAft>
-                <a:spcPts val="800"/>
-              </a:spcAft>
-              <a:defRPr sz="1600">
-                <a:solidFill>
-                  <a:srgbClr val="333333"/>
-                </a:solidFill>
-              </a:defRPr>
-            </a:pPr>
-            <a:r>
-              <a:t>• Ongoing: Integrate security awareness into broader staff training beyond HIPAA privacy</a:t>
-            </a:r>
-          </a:p>
-          <a:p>
-            <a:pPr>
-              <a:spcAft>
-                <a:spcPts val="800"/>
-              </a:spcAft>
-              <a:defRPr sz="1600">
-                <a:solidFill>
-                  <a:srgbClr val="333333"/>
-                </a:solidFill>
-              </a:defRPr>
-            </a:pPr>
-            <a:r>
-              <a:t>• Strategic: Evaluate vendor options with explicit security requirements</a:t>
-            </a:r>
-          </a:p>
-          <a:p>
-            <a:pPr>
-              <a:spcAft>
-                <a:spcPts val="800"/>
-              </a:spcAft>
-              <a:defRPr sz="1600">
-                <a:solidFill>
-                  <a:srgbClr val="333333"/>
-                </a:solidFill>
-              </a:defRPr>
-            </a:pPr>
-            <a:r>
-              <a:t>• Institutional: Build incident response protocols into regular staff communication</a:t>
-            </a:r>
-          </a:p>
-        </p:txBody>
-      </p:sp>
-    </p:spTree>
-  </p:cSld>
-  <p:clrMapOvr>
-    <a:masterClrMapping/>
-  </p:clrMapOvr>
-</p:sld>
-</file>
-
-<file path=ppt/slides/slide36.xml><?xml version="1.0" encoding="utf-8"?>
-<p:sld xmlns:a="http://schemas.openxmlformats.org/drawingml/2006/main" xmlns:p="http://schemas.openxmlformats.org/presentationml/2006/main" xmlns:r="http://schemas.openxmlformats.org/officeDocument/2006/relationships">
-  <p:cSld>
-    <p:bg>
-      <p:bgPr>
-        <a:solidFill>
-          <a:srgbClr val="FFFFFF"/>
-        </a:solidFill>
-        <a:effectLst/>
-      </p:bgPr>
-    </p:bg>
-    <p:spTree>
-      <p:nvGrpSpPr>
-        <p:cNvPr id="1" name=""/>
-        <p:cNvGrpSpPr/>
-        <p:nvPr/>
-      </p:nvGrpSpPr>
-      <p:grpSpPr/>
-      <p:sp>
-        <p:nvSpPr>
-          <p:cNvPr id="2" name="TextBox 1"/>
-          <p:cNvSpPr txBox="1"/>
-          <p:nvPr/>
-        </p:nvSpPr>
-        <p:spPr>
-          <a:xfrm>
-            <a:off x="457200" y="365760"/>
-            <a:ext cx="8229600" cy="548640"/>
-          </a:xfrm>
-          <a:prstGeom prst="rect">
-            <a:avLst/>
-          </a:prstGeom>
-          <a:noFill/>
-        </p:spPr>
-        <p:txBody>
-          <a:bodyPr wrap="square">
-            <a:spAutoFit/>
-          </a:bodyPr>
-          <a:lstStyle/>
-          <a:p>
-            <a:pPr>
-              <a:defRPr sz="2800" b="1">
-                <a:solidFill>
-                  <a:srgbClr val="1B3A6B"/>
-                </a:solidFill>
-              </a:defRPr>
-            </a:pPr>
-            <a:r>
-              <a:t>Recommendations for Future Research</a:t>
-            </a:r>
-          </a:p>
-        </p:txBody>
-      </p:sp>
-      <p:cxnSp>
-        <p:nvCxnSpPr>
-          <p:cNvPr id="3" name="Connector 2"/>
-          <p:cNvCxnSpPr/>
-          <p:nvPr/>
-        </p:nvCxnSpPr>
-        <p:spPr>
-          <a:xfrm>
-            <a:off x="457200" y="1005840"/>
-            <a:ext cx="8229600" cy="0"/>
-          </a:xfrm>
-          <a:prstGeom prst="line">
-            <a:avLst/>
-          </a:prstGeom>
-          <a:ln w="25400">
-            <a:solidFill>
-              <a:srgbClr val="4A90E2"/>
-            </a:solidFill>
-          </a:ln>
-        </p:spPr>
-        <p:style>
-          <a:lnRef idx="2">
-            <a:schemeClr val="accent1"/>
-          </a:lnRef>
-          <a:fillRef idx="0">
-            <a:schemeClr val="accent1"/>
-          </a:fillRef>
-          <a:effectRef idx="1">
-            <a:schemeClr val="accent1"/>
-          </a:effectRef>
-          <a:fontRef idx="minor">
-            <a:schemeClr val="tx1"/>
-          </a:fontRef>
-        </p:style>
-      </p:cxnSp>
-      <p:sp>
-        <p:nvSpPr>
-          <p:cNvPr id="4" name="TextBox 3"/>
-          <p:cNvSpPr txBox="1"/>
-          <p:nvPr/>
-        </p:nvSpPr>
-        <p:spPr>
-          <a:xfrm>
-            <a:off x="640080" y="1234440"/>
-            <a:ext cx="8046720" cy="4754880"/>
-          </a:xfrm>
-          <a:prstGeom prst="rect">
-            <a:avLst/>
-          </a:prstGeom>
-          <a:noFill/>
-        </p:spPr>
-        <p:txBody>
-          <a:bodyPr wrap="square">
-            <a:spAutoFit/>
-          </a:bodyPr>
-          <a:lstStyle/>
-          <a:p>
-            <a:pPr>
-              <a:spcAft>
-                <a:spcPts val="800"/>
-              </a:spcAft>
-              <a:defRPr sz="1600">
-                <a:solidFill>
-                  <a:srgbClr val="333333"/>
-                </a:solidFill>
-              </a:defRPr>
-            </a:pPr>
-            <a:r>
-              <a:t>• Multi-site case studies examining 3–5 small independent practices</a:t>
-            </a:r>
-          </a:p>
-          <a:p>
-            <a:pPr>
-              <a:spcAft>
-                <a:spcPts val="800"/>
-              </a:spcAft>
-              <a:defRPr sz="1600">
-                <a:solidFill>
-                  <a:srgbClr val="333333"/>
-                </a:solidFill>
-              </a:defRPr>
-            </a:pPr>
-            <a:r>
-              <a:t>• Longitudinal study tracking IS governance improvements and patient satisfaction changes</a:t>
-            </a:r>
-          </a:p>
-          <a:p>
-            <a:pPr>
-              <a:spcAft>
-                <a:spcPts val="800"/>
-              </a:spcAft>
-              <a:defRPr sz="1600">
-                <a:solidFill>
-                  <a:srgbClr val="333333"/>
-                </a:solidFill>
-              </a:defRPr>
-            </a:pPr>
-            <a:r>
-              <a:t>• Quantitative study of CG-CAHPS scores pre- and post-governance intervention</a:t>
-            </a:r>
-          </a:p>
-          <a:p>
-            <a:pPr>
-              <a:spcAft>
-                <a:spcPts val="800"/>
-              </a:spcAft>
-              <a:defRPr sz="1600">
-                <a:solidFill>
-                  <a:srgbClr val="333333"/>
-                </a:solidFill>
-              </a:defRPr>
-            </a:pPr>
-            <a:r>
-              <a:t>• Research on organizational culture shifts in resource-constrained healthcare settings</a:t>
-            </a:r>
-          </a:p>
-          <a:p>
-            <a:pPr>
-              <a:spcAft>
-                <a:spcPts val="800"/>
-              </a:spcAft>
-              <a:defRPr sz="1600">
-                <a:solidFill>
-                  <a:srgbClr val="333333"/>
-                </a:solidFill>
-              </a:defRPr>
-            </a:pPr>
-            <a:r>
-              <a:t>• Investigation of vendor accountability mechanisms for small practice security</a:t>
-            </a:r>
-          </a:p>
-        </p:txBody>
-      </p:sp>
-    </p:spTree>
-  </p:cSld>
-  <p:clrMapOvr>
-    <a:masterClrMapping/>
-  </p:clrMapOvr>
-</p:sld>
-</file>
-
-<file path=ppt/slides/slide37.xml><?xml version="1.0" encoding="utf-8"?>
-<p:sld xmlns:a="http://schemas.openxmlformats.org/drawingml/2006/main" xmlns:p="http://schemas.openxmlformats.org/presentationml/2006/main" xmlns:r="http://schemas.openxmlformats.org/officeDocument/2006/relationships">
-  <p:cSld>
-    <p:bg>
-      <p:bgPr>
-        <a:solidFill>
-          <a:srgbClr val="FFFFFF"/>
-        </a:solidFill>
-        <a:effectLst/>
-      </p:bgPr>
-    </p:bg>
-    <p:spTree>
-      <p:nvGrpSpPr>
-        <p:cNvPr id="1" name=""/>
-        <p:cNvGrpSpPr/>
-        <p:nvPr/>
-      </p:nvGrpSpPr>
-      <p:grpSpPr/>
-      <p:sp>
-        <p:nvSpPr>
-          <p:cNvPr id="2" name="TextBox 1"/>
-          <p:cNvSpPr txBox="1"/>
-          <p:nvPr/>
-        </p:nvSpPr>
-        <p:spPr>
-          <a:xfrm>
-            <a:off x="457200" y="365760"/>
-            <a:ext cx="8229600" cy="548640"/>
-          </a:xfrm>
-          <a:prstGeom prst="rect">
-            <a:avLst/>
-          </a:prstGeom>
-          <a:noFill/>
-        </p:spPr>
-        <p:txBody>
-          <a:bodyPr wrap="square">
-            <a:spAutoFit/>
-          </a:bodyPr>
-          <a:lstStyle/>
-          <a:p>
-            <a:pPr>
-              <a:defRPr sz="2800" b="1">
-                <a:solidFill>
-                  <a:srgbClr val="1B3A6B"/>
-                </a:solidFill>
-              </a:defRPr>
-            </a:pPr>
-            <a:r>
-              <a:t>Summary and Study Conclusion</a:t>
-            </a:r>
-          </a:p>
-        </p:txBody>
-      </p:sp>
-      <p:cxnSp>
-        <p:nvCxnSpPr>
-          <p:cNvPr id="3" name="Connector 2"/>
-          <p:cNvCxnSpPr/>
-          <p:nvPr/>
-        </p:nvCxnSpPr>
-        <p:spPr>
-          <a:xfrm>
-            <a:off x="457200" y="1005840"/>
-            <a:ext cx="8229600" cy="0"/>
-          </a:xfrm>
-          <a:prstGeom prst="line">
-            <a:avLst/>
-          </a:prstGeom>
-          <a:ln w="25400">
-            <a:solidFill>
-              <a:srgbClr val="4A90E2"/>
-            </a:solidFill>
-          </a:ln>
-        </p:spPr>
-        <p:style>
-          <a:lnRef idx="2">
-            <a:schemeClr val="accent1"/>
-          </a:lnRef>
-          <a:fillRef idx="0">
-            <a:schemeClr val="accent1"/>
-          </a:fillRef>
-          <a:effectRef idx="1">
-            <a:schemeClr val="accent1"/>
-          </a:effectRef>
-          <a:fontRef idx="minor">
-            <a:schemeClr val="tx1"/>
-          </a:fontRef>
-        </p:style>
-      </p:cxnSp>
-      <p:sp>
-        <p:nvSpPr>
-          <p:cNvPr id="4" name="TextBox 3"/>
-          <p:cNvSpPr txBox="1"/>
-          <p:nvPr/>
-        </p:nvSpPr>
-        <p:spPr>
-          <a:xfrm>
-            <a:off x="640080" y="1234440"/>
-            <a:ext cx="8046720" cy="4754880"/>
-          </a:xfrm>
-          <a:prstGeom prst="rect">
-            <a:avLst/>
-          </a:prstGeom>
-          <a:noFill/>
-        </p:spPr>
-        <p:txBody>
-          <a:bodyPr wrap="square">
-            <a:spAutoFit/>
-          </a:bodyPr>
-          <a:lstStyle/>
-          <a:p>
-            <a:pPr>
-              <a:spcAft>
-                <a:spcPts val="800"/>
-              </a:spcAft>
-              <a:defRPr sz="1600">
-                <a:solidFill>
-                  <a:srgbClr val="333333"/>
-                </a:solidFill>
-              </a:defRPr>
-            </a:pPr>
-            <a:r>
-              <a:t>• IS governance failures at NP Clinic are real and measurable</a:t>
-            </a:r>
-          </a:p>
-          <a:p>
-            <a:pPr>
-              <a:spcAft>
-                <a:spcPts val="800"/>
-              </a:spcAft>
-              <a:defRPr sz="1600">
-                <a:solidFill>
-                  <a:srgbClr val="333333"/>
-                </a:solidFill>
-              </a:defRPr>
-            </a:pPr>
-            <a:r>
-              <a:t>• Governance gaps translate directly into operational disruptions affecting workflow</a:t>
-            </a:r>
-          </a:p>
-          <a:p>
-            <a:pPr>
-              <a:spcAft>
-                <a:spcPts val="800"/>
-              </a:spcAft>
-              <a:defRPr sz="1600">
-                <a:solidFill>
-                  <a:srgbClr val="333333"/>
-                </a:solidFill>
-              </a:defRPr>
-            </a:pPr>
-            <a:r>
-              <a:t>• Disruptions manifest as communication delays, scheduling challenges, care postponement</a:t>
-            </a:r>
-          </a:p>
-          <a:p>
-            <a:pPr>
-              <a:spcAft>
-                <a:spcPts val="800"/>
-              </a:spcAft>
-              <a:defRPr sz="1600">
-                <a:solidFill>
-                  <a:srgbClr val="333333"/>
-                </a:solidFill>
-              </a:defRPr>
-            </a:pPr>
-            <a:r>
-              <a:t>• Hospital-centric evidence holds at small practice scale with contextual modifications</a:t>
-            </a:r>
-          </a:p>
-          <a:p>
-            <a:pPr>
-              <a:spcAft>
-                <a:spcPts val="800"/>
-              </a:spcAft>
-              <a:defRPr sz="1600">
-                <a:solidFill>
-                  <a:srgbClr val="333333"/>
-                </a:solidFill>
-              </a:defRPr>
-            </a:pPr>
-            <a:r>
-              <a:t>• Recommendations must be sized to resource constraints while meeting regulatory obligations</a:t>
-            </a:r>
-          </a:p>
-        </p:txBody>
-      </p:sp>
-    </p:spTree>
-  </p:cSld>
-  <p:clrMapOvr>
-    <a:masterClrMapping/>
-  </p:clrMapOvr>
-</p:sld>
-</file>
-
-<file path=ppt/slides/slide38.xml><?xml version="1.0" encoding="utf-8"?>
-<p:sld xmlns:a="http://schemas.openxmlformats.org/drawingml/2006/main" xmlns:p="http://schemas.openxmlformats.org/presentationml/2006/main" xmlns:r="http://schemas.openxmlformats.org/officeDocument/2006/relationships">
-  <p:cSld>
-    <p:bg>
-      <p:bgPr>
-        <a:solidFill>
-          <a:srgbClr val="FFFFFF"/>
-        </a:solidFill>
-        <a:effectLst/>
-      </p:bgPr>
-    </p:bg>
-    <p:spTree>
-      <p:nvGrpSpPr>
-        <p:cNvPr id="1" name=""/>
-        <p:cNvGrpSpPr/>
-        <p:nvPr/>
-      </p:nvGrpSpPr>
-      <p:grpSpPr/>
-      <p:sp>
-        <p:nvSpPr>
-          <p:cNvPr id="2" name="TextBox 1"/>
-          <p:cNvSpPr txBox="1"/>
-          <p:nvPr/>
-        </p:nvSpPr>
-        <p:spPr>
-          <a:xfrm>
-            <a:off x="457200" y="365760"/>
-            <a:ext cx="8229600" cy="548640"/>
-          </a:xfrm>
-          <a:prstGeom prst="rect">
-            <a:avLst/>
-          </a:prstGeom>
-          <a:noFill/>
-        </p:spPr>
-        <p:txBody>
-          <a:bodyPr wrap="none">
-            <a:spAutoFit/>
-          </a:bodyPr>
-          <a:lstStyle/>
-          <a:p>
-            <a:pPr>
-              <a:defRPr sz="2800" b="1">
-                <a:solidFill>
-                  <a:srgbClr val="1B3A6B"/>
-                </a:solidFill>
-              </a:defRPr>
-            </a:pPr>
-            <a:r>
-              <a:t>References (1 of 2)</a:t>
-            </a:r>
-          </a:p>
-        </p:txBody>
-      </p:sp>
-      <p:cxnSp>
-        <p:nvCxnSpPr>
-          <p:cNvPr id="3" name="Connector 2"/>
-          <p:cNvCxnSpPr/>
-          <p:nvPr/>
-        </p:nvCxnSpPr>
-        <p:spPr>
-          <a:xfrm>
-            <a:off x="457200" y="1005840"/>
-            <a:ext cx="8229600" cy="0"/>
-          </a:xfrm>
-          <a:prstGeom prst="line">
-            <a:avLst/>
-          </a:prstGeom>
-          <a:ln w="25400">
-            <a:solidFill>
-              <a:srgbClr val="4A90E2"/>
-            </a:solidFill>
-          </a:ln>
-        </p:spPr>
-        <p:style>
-          <a:lnRef idx="2">
-            <a:schemeClr val="accent1"/>
-          </a:lnRef>
-          <a:fillRef idx="0">
-            <a:schemeClr val="accent1"/>
-          </a:fillRef>
-          <a:effectRef idx="1">
-            <a:schemeClr val="accent1"/>
-          </a:effectRef>
-          <a:fontRef idx="minor">
-            <a:schemeClr val="tx1"/>
-          </a:fontRef>
-        </p:style>
-      </p:cxnSp>
-      <p:sp>
-        <p:nvSpPr>
-          <p:cNvPr id="4" name="TextBox 3"/>
-          <p:cNvSpPr txBox="1"/>
-          <p:nvPr/>
-        </p:nvSpPr>
-        <p:spPr>
-          <a:xfrm>
-            <a:off x="457200" y="1234440"/>
-            <a:ext cx="8229600" cy="5303520"/>
-          </a:xfrm>
-          <a:prstGeom prst="rect">
-            <a:avLst/>
-          </a:prstGeom>
-          <a:noFill/>
-        </p:spPr>
-        <p:txBody>
-          <a:bodyPr wrap="square">
-            <a:spAutoFit/>
-          </a:bodyPr>
-          <a:lstStyle/>
-          <a:p>
-            <a:pPr>
-              <a:spcAft>
-                <a:spcPts val="600"/>
-              </a:spcAft>
-              <a:defRPr sz="1000">
-                <a:solidFill>
-                  <a:srgbClr val="333333"/>
-                </a:solidFill>
-              </a:defRPr>
-            </a:pPr>
-            <a:r>
-              <a:t>Alanazi, M. Q. (2023). Cybersecurity implementation barriers in healthcare. Healthcare Management Review, 48(3), 234–242.</a:t>
-            </a:r>
-          </a:p>
-          <a:p>
-            <a:pPr>
-              <a:spcAft>
-                <a:spcPts val="600"/>
-              </a:spcAft>
-              <a:defRPr sz="1000">
-                <a:solidFill>
-                  <a:srgbClr val="333333"/>
-                </a:solidFill>
-              </a:defRPr>
-            </a:pPr>
-            <a:r>
-              <a:t>Argaw, S. T., Tremblay, M. E., Haney, B., &amp; Angelique, P. (2020). Cybersecurity of hospitals: Implications for patient safety. Journal of Medical Systems, 44(4), 78. https://doi.org/10.1007/s10916-020-1556-2</a:t>
-            </a:r>
-          </a:p>
-          <a:p>
-            <a:pPr>
-              <a:spcAft>
-                <a:spcPts val="600"/>
-              </a:spcAft>
-              <a:defRPr sz="1000">
-                <a:solidFill>
-                  <a:srgbClr val="333333"/>
-                </a:solidFill>
-              </a:defRPr>
-            </a:pPr>
-            <a:r>
-              <a:t>Braun, V., &amp; Clarke, V. (2021). Reflecting on reflexive thematic analysis. Qualitative Research in Sport, Exercise and Health, 13(4), 1–9.</a:t>
-            </a:r>
-          </a:p>
-          <a:p>
-            <a:pPr>
-              <a:spcAft>
-                <a:spcPts val="600"/>
-              </a:spcAft>
-              <a:defRPr sz="1000">
-                <a:solidFill>
-                  <a:srgbClr val="333333"/>
-                </a:solidFill>
-              </a:defRPr>
-            </a:pPr>
-            <a:r>
-              <a:t>Campbell, S., Greenwood, M., Prior, S., Shearer, T., Walkem, K., Young, S., ... &amp; Walker, K. (2020). Purposive sampling: Complex or simple? Research Case Studies, 14(8), 1–8.</a:t>
-            </a:r>
-          </a:p>
-          <a:p>
-            <a:pPr>
-              <a:spcAft>
-                <a:spcPts val="600"/>
-              </a:spcAft>
-              <a:defRPr sz="1000">
-                <a:solidFill>
-                  <a:srgbClr val="333333"/>
-                </a:solidFill>
-              </a:defRPr>
-            </a:pPr>
-            <a:r>
-              <a:t>Choi, J. K., Slavin, K., &amp; Nouri, S. (2019). Effects of electronic health record downtime on adverse events. JAMA, 325(9), 874–883.</a:t>
-            </a:r>
-          </a:p>
-        </p:txBody>
-      </p:sp>
-    </p:spTree>
-  </p:cSld>
-  <p:clrMapOvr>
-    <a:masterClrMapping/>
-  </p:clrMapOvr>
-</p:sld>
-</file>
-
-<file path=ppt/slides/slide39.xml><?xml version="1.0" encoding="utf-8"?>
-<p:sld xmlns:a="http://schemas.openxmlformats.org/drawingml/2006/main" xmlns:p="http://schemas.openxmlformats.org/presentationml/2006/main" xmlns:r="http://schemas.openxmlformats.org/officeDocument/2006/relationships">
-  <p:cSld>
-    <p:bg>
-      <p:bgPr>
-        <a:solidFill>
-          <a:srgbClr val="FFFFFF"/>
-        </a:solidFill>
-        <a:effectLst/>
-      </p:bgPr>
-    </p:bg>
-    <p:spTree>
-      <p:nvGrpSpPr>
-        <p:cNvPr id="1" name=""/>
-        <p:cNvGrpSpPr/>
-        <p:nvPr/>
-      </p:nvGrpSpPr>
-      <p:grpSpPr/>
-      <p:sp>
-        <p:nvSpPr>
-          <p:cNvPr id="2" name="TextBox 1"/>
-          <p:cNvSpPr txBox="1"/>
-          <p:nvPr/>
-        </p:nvSpPr>
-        <p:spPr>
-          <a:xfrm>
-            <a:off x="457200" y="365760"/>
-            <a:ext cx="8229600" cy="548640"/>
-          </a:xfrm>
-          <a:prstGeom prst="rect">
-            <a:avLst/>
-          </a:prstGeom>
-          <a:noFill/>
-        </p:spPr>
-        <p:txBody>
-          <a:bodyPr wrap="none">
-            <a:spAutoFit/>
-          </a:bodyPr>
-          <a:lstStyle/>
-          <a:p>
-            <a:pPr>
-              <a:defRPr sz="2800" b="1">
-                <a:solidFill>
-                  <a:srgbClr val="1B3A6B"/>
-                </a:solidFill>
-              </a:defRPr>
-            </a:pPr>
-            <a:r>
-              <a:t>References (2 of 2)</a:t>
-            </a:r>
-          </a:p>
-        </p:txBody>
-      </p:sp>
-      <p:cxnSp>
-        <p:nvCxnSpPr>
-          <p:cNvPr id="3" name="Connector 2"/>
-          <p:cNvCxnSpPr/>
-          <p:nvPr/>
-        </p:nvCxnSpPr>
-        <p:spPr>
-          <a:xfrm>
-            <a:off x="457200" y="1005840"/>
-            <a:ext cx="8229600" cy="0"/>
-          </a:xfrm>
-          <a:prstGeom prst="line">
-            <a:avLst/>
-          </a:prstGeom>
-          <a:ln w="25400">
-            <a:solidFill>
-              <a:srgbClr val="4A90E2"/>
-            </a:solidFill>
-          </a:ln>
-        </p:spPr>
-        <p:style>
-          <a:lnRef idx="2">
-            <a:schemeClr val="accent1"/>
-          </a:lnRef>
-          <a:fillRef idx="0">
-            <a:schemeClr val="accent1"/>
-          </a:fillRef>
-          <a:effectRef idx="1">
-            <a:schemeClr val="accent1"/>
-          </a:effectRef>
-          <a:fontRef idx="minor">
-            <a:schemeClr val="tx1"/>
-          </a:fontRef>
-        </p:style>
-      </p:cxnSp>
-      <p:sp>
-        <p:nvSpPr>
-          <p:cNvPr id="4" name="TextBox 3"/>
-          <p:cNvSpPr txBox="1"/>
-          <p:nvPr/>
-        </p:nvSpPr>
-        <p:spPr>
-          <a:xfrm>
-            <a:off x="457200" y="1234440"/>
-            <a:ext cx="8229600" cy="5303520"/>
-          </a:xfrm>
-          <a:prstGeom prst="rect">
-            <a:avLst/>
-          </a:prstGeom>
-          <a:noFill/>
-        </p:spPr>
-        <p:txBody>
-          <a:bodyPr wrap="square">
-            <a:spAutoFit/>
-          </a:bodyPr>
-          <a:lstStyle/>
-          <a:p>
-            <a:pPr>
-              <a:spcAft>
-                <a:spcPts val="600"/>
-              </a:spcAft>
-              <a:defRPr sz="1000">
-                <a:solidFill>
-                  <a:srgbClr val="333333"/>
-                </a:solidFill>
-              </a:defRPr>
-            </a:pPr>
-            <a:r>
-              <a:t>Coventry, L., &amp; Branley, D. (2018). Cybersecurity in healthcare: Evaluating the risk of unmet expectations. Computers &amp; Security, 80, 160–171.</a:t>
-            </a:r>
-          </a:p>
-          <a:p>
-            <a:pPr>
-              <a:spcAft>
-                <a:spcPts val="600"/>
-              </a:spcAft>
-              <a:defRPr sz="1000">
-                <a:solidFill>
-                  <a:srgbClr val="333333"/>
-                </a:solidFill>
-              </a:defRPr>
-            </a:pPr>
-            <a:r>
-              <a:t>Darzi, A., Boyle, A. M., &amp; Gutacker, N. (2023). How good is the NHS? BMJ, 381, o1736.</a:t>
-            </a:r>
-          </a:p>
-          <a:p>
-            <a:pPr>
-              <a:spcAft>
-                <a:spcPts val="600"/>
-              </a:spcAft>
-              <a:defRPr sz="1000">
-                <a:solidFill>
-                  <a:srgbClr val="333333"/>
-                </a:solidFill>
-              </a:defRPr>
-            </a:pPr>
-            <a:r>
-              <a:t>Guest, G., Namey, E., &amp; McKenna, K. (2020). How many focus groups are enough? Building an evidence base for nonprobability sample sizes. Field Methods, 29(1), 23–45.</a:t>
-            </a:r>
-          </a:p>
-          <a:p>
-            <a:pPr>
-              <a:spcAft>
-                <a:spcPts val="600"/>
-              </a:spcAft>
-              <a:defRPr sz="1000">
-                <a:solidFill>
-                  <a:srgbClr val="333333"/>
-                </a:solidFill>
-              </a:defRPr>
-            </a:pPr>
-            <a:r>
-              <a:t>Miller, S., McBride, K., &amp; Wilkins, K. (2023). Conducting qualitative research. SAGE Publications.</a:t>
-            </a:r>
-          </a:p>
-          <a:p>
-            <a:pPr>
-              <a:spcAft>
-                <a:spcPts val="600"/>
-              </a:spcAft>
-              <a:defRPr sz="1000">
-                <a:solidFill>
-                  <a:srgbClr val="333333"/>
-                </a:solidFill>
-              </a:defRPr>
-            </a:pPr>
-            <a:r>
-              <a:t>Nifakos, S., Tsalis, G., Konstantopoulou, A., &amp; Tsani, S. (2021). Assessing employees' behaviour towards information security. International Journal of Human-Computer Studies, 156, 102718.</a:t>
+              <a:t>RQ2: How does this governance gap affect the patient experience?</a:t>
             </a:r>
           </a:p>
         </p:txBody>
@@ -9968,7 +5295,7 @@
               </a:defRPr>
             </a:pPr>
             <a:r>
-              <a:t>Problem Statement</a:t>
+              <a:t>Why This Study Matters</a:t>
             </a:r>
           </a:p>
         </p:txBody>
@@ -10032,7 +5359,7 @@
           <a:p>
             <a:pPr>
               <a:spcAft>
-                <a:spcPts val="800"/>
+                <a:spcPts val="1000"/>
               </a:spcAft>
               <a:defRPr sz="1600">
                 <a:solidFill>
@@ -10041,13 +5368,13 @@
               </a:defRPr>
             </a:pPr>
             <a:r>
-              <a:t>• General: Small practices have not effectively adopted IS programs based on industry standards</a:t>
+              <a:t>• First study linking IS governance to patient satisfaction at small clinics using CG-CAHPS</a:t>
             </a:r>
           </a:p>
           <a:p>
             <a:pPr>
               <a:spcAft>
-                <a:spcPts val="800"/>
+                <a:spcPts val="1000"/>
               </a:spcAft>
               <a:defRPr sz="1600">
                 <a:solidFill>
@@ -10056,13 +5383,13 @@
               </a:defRPr>
             </a:pPr>
             <a:r>
-              <a:t>• Result: Exposure to cybersecurity incidents and potential degradation of patient experience</a:t>
+              <a:t>• Extends hospital research to where most Americans receive routine care</a:t>
             </a:r>
           </a:p>
           <a:p>
             <a:pPr>
               <a:spcAft>
-                <a:spcPts val="800"/>
+                <a:spcPts val="1000"/>
               </a:spcAft>
               <a:defRPr sz="1600">
                 <a:solidFill>
@@ -10071,13 +5398,13 @@
               </a:defRPr>
             </a:pPr>
             <a:r>
-              <a:t>• Specific: Absence of formal cybersecurity governance within NP Clinic has contributed to declining satisfaction scores</a:t>
+              <a:t>• Provides realistic, resource-scaled recommendations</a:t>
             </a:r>
           </a:p>
           <a:p>
             <a:pPr>
               <a:spcAft>
-                <a:spcPts val="800"/>
+                <a:spcPts val="1000"/>
               </a:spcAft>
               <a:defRPr sz="1600">
                 <a:solidFill>
@@ -10086,111 +5413,7 @@
               </a:defRPr>
             </a:pPr>
             <a:r>
-              <a:t>• Focus: How IS governance gaps relate to CG-CAHPS-aligned patient satisfaction</a:t>
-            </a:r>
-          </a:p>
-        </p:txBody>
-      </p:sp>
-    </p:spTree>
-  </p:cSld>
-  <p:clrMapOvr>
-    <a:masterClrMapping/>
-  </p:clrMapOvr>
-</p:sld>
-</file>
-
-<file path=ppt/slides/slide40.xml><?xml version="1.0" encoding="utf-8"?>
-<p:sld xmlns:a="http://schemas.openxmlformats.org/drawingml/2006/main" xmlns:p="http://schemas.openxmlformats.org/presentationml/2006/main" xmlns:r="http://schemas.openxmlformats.org/officeDocument/2006/relationships">
-  <p:cSld>
-    <p:bg>
-      <p:bgPr>
-        <a:solidFill>
-          <a:srgbClr val="1B3A6B"/>
-        </a:solidFill>
-        <a:effectLst/>
-      </p:bgPr>
-    </p:bg>
-    <p:spTree>
-      <p:nvGrpSpPr>
-        <p:cNvPr id="1" name=""/>
-        <p:cNvGrpSpPr/>
-        <p:nvPr/>
-      </p:nvGrpSpPr>
-      <p:grpSpPr/>
-      <p:sp>
-        <p:nvSpPr>
-          <p:cNvPr id="2" name="TextBox 1"/>
-          <p:cNvSpPr txBox="1"/>
-          <p:nvPr/>
-        </p:nvSpPr>
-        <p:spPr>
-          <a:xfrm>
-            <a:off x="457200" y="2286000"/>
-            <a:ext cx="8229600" cy="1097280"/>
-          </a:xfrm>
-          <a:prstGeom prst="rect">
-            <a:avLst/>
-          </a:prstGeom>
-          <a:noFill/>
-        </p:spPr>
-        <p:txBody>
-          <a:bodyPr wrap="none">
-            <a:spAutoFit/>
-          </a:bodyPr>
-          <a:lstStyle/>
-          <a:p>
-            <a:pPr algn="ctr">
-              <a:defRPr sz="4800" b="1">
-                <a:solidFill>
-                  <a:srgbClr val="FFFFFF"/>
-                </a:solidFill>
-              </a:defRPr>
-            </a:pPr>
-            <a:r>
-              <a:t>Questions?</a:t>
-            </a:r>
-          </a:p>
-        </p:txBody>
-      </p:sp>
-      <p:sp>
-        <p:nvSpPr>
-          <p:cNvPr id="3" name="TextBox 2"/>
-          <p:cNvSpPr txBox="1"/>
-          <p:nvPr/>
-        </p:nvSpPr>
-        <p:spPr>
-          <a:xfrm>
-            <a:off x="457200" y="3657600"/>
-            <a:ext cx="8229600" cy="1828800"/>
-          </a:xfrm>
-          <a:prstGeom prst="rect">
-            <a:avLst/>
-          </a:prstGeom>
-          <a:noFill/>
-        </p:spPr>
-        <p:txBody>
-          <a:bodyPr wrap="square">
-            <a:spAutoFit/>
-          </a:bodyPr>
-          <a:lstStyle/>
-          <a:p>
-            <a:pPr algn="ctr">
-              <a:defRPr sz="1600">
-                <a:solidFill>
-                  <a:srgbClr val="FFFFFF"/>
-                </a:solidFill>
-              </a:defRPr>
-            </a:pPr>
-            <a:r>
-              <a:t>Lavurn Nolen</a:t>
-            </a:r>
-            <a:br/>
-            <a:r>
-              <a:t>Doctor of Business Administration</a:t>
-            </a:r>
-            <a:br/>
-            <a:r>
-              <a:t>California Intercontinental University</a:t>
+              <a:t>• Informs policy on cybersecurity expectations for small practices</a:t>
             </a:r>
           </a:p>
         </p:txBody>
@@ -10251,7 +5474,7 @@
               </a:defRPr>
             </a:pPr>
             <a:r>
-              <a:t>Purpose Statement</a:t>
+              <a:t>What Literature Tells Us</a:t>
             </a:r>
           </a:p>
         </p:txBody>
@@ -10315,7 +5538,7 @@
           <a:p>
             <a:pPr>
               <a:spcAft>
-                <a:spcPts val="800"/>
+                <a:spcPts val="1000"/>
               </a:spcAft>
               <a:defRPr sz="1600">
                 <a:solidFill>
@@ -10324,13 +5547,13 @@
               </a:defRPr>
             </a:pPr>
             <a:r>
-              <a:t>• Examine why NP Clinic failed to implement robust cybersecurity IS governance</a:t>
+              <a:t>• Hospital studies: Cybersecurity breaches lead to operational disruption (Choi et al., 2019)</a:t>
             </a:r>
           </a:p>
           <a:p>
             <a:pPr>
               <a:spcAft>
-                <a:spcPts val="800"/>
+                <a:spcPts val="1000"/>
               </a:spcAft>
               <a:defRPr sz="1600">
                 <a:solidFill>
@@ -10339,13 +5562,13 @@
               </a:defRPr>
             </a:pPr>
             <a:r>
-              <a:t>• Explore the impact on patient satisfaction measured through CG-CAHPS</a:t>
+              <a:t>• Downstream effect: Disruptions reach patients through care delays (Argaw et al., 2020)</a:t>
             </a:r>
           </a:p>
           <a:p>
             <a:pPr>
               <a:spcAft>
-                <a:spcPts val="800"/>
+                <a:spcPts val="1000"/>
               </a:spcAft>
               <a:defRPr sz="1600">
                 <a:solidFill>
@@ -10354,13 +5577,13 @@
               </a:defRPr>
             </a:pPr>
             <a:r>
-              <a:t>• Investigate how absence of NIST, HIPAA, and HICP-aligned practices affects cybersecurity exposure</a:t>
+              <a:t>• Human factor: Organizational culture &amp; time constraints shape security outcomes (Nifakos et al., 2021)</a:t>
             </a:r>
           </a:p>
           <a:p>
             <a:pPr>
               <a:spcAft>
-                <a:spcPts val="800"/>
+                <a:spcPts val="1000"/>
               </a:spcAft>
               <a:defRPr sz="1600">
                 <a:solidFill>
@@ -10369,22 +5592,42 @@
               </a:defRPr>
             </a:pPr>
             <a:r>
-              <a:t>• Identify specific IS governance gaps at this organization</a:t>
-            </a:r>
-          </a:p>
-          <a:p>
-            <a:pPr>
-              <a:spcAft>
-                <a:spcPts val="800"/>
-              </a:spcAft>
-              <a:defRPr sz="1600">
-                <a:solidFill>
-                  <a:srgbClr val="333333"/>
-                </a:solidFill>
-              </a:defRPr>
-            </a:pPr>
-            <a:r>
-              <a:t>• Provide actionable recommendations sized to resource constraints of small practices</a:t>
+              <a:t>• Gap: No research at small independent practices</a:t>
+            </a:r>
+          </a:p>
+        </p:txBody>
+      </p:sp>
+      <p:sp>
+        <p:nvSpPr>
+          <p:cNvPr id="5" name="TextBox 4"/>
+          <p:cNvSpPr txBox="1"/>
+          <p:nvPr/>
+        </p:nvSpPr>
+        <p:spPr>
+          <a:xfrm>
+            <a:off x="640080" y="5943600"/>
+            <a:ext cx="8046720" cy="822960"/>
+          </a:xfrm>
+          <a:prstGeom prst="rect">
+            <a:avLst/>
+          </a:prstGeom>
+          <a:noFill/>
+        </p:spPr>
+        <p:txBody>
+          <a:bodyPr wrap="square">
+            <a:spAutoFit/>
+          </a:bodyPr>
+          <a:lstStyle/>
+          <a:p>
+            <a:pPr>
+              <a:defRPr sz="1000" i="1">
+                <a:solidFill>
+                  <a:srgbClr val="333333"/>
+                </a:solidFill>
+              </a:defRPr>
+            </a:pPr>
+            <a:r>
+              <a:t>(Choi et al., 2019; Argaw et al., 2020; Nifakos et al., 2021)</a:t>
             </a:r>
           </a:p>
         </p:txBody>
@@ -10445,7 +5688,7 @@
               </a:defRPr>
             </a:pPr>
             <a:r>
-              <a:t>Significance of the Study</a:t>
+              <a:t>Methodology</a:t>
             </a:r>
           </a:p>
         </p:txBody>
@@ -10509,7 +5752,7 @@
           <a:p>
             <a:pPr>
               <a:spcAft>
-                <a:spcPts val="800"/>
+                <a:spcPts val="1000"/>
               </a:spcAft>
               <a:defRPr sz="1600">
                 <a:solidFill>
@@ -10518,13 +5761,13 @@
               </a:defRPr>
             </a:pPr>
             <a:r>
-              <a:t>• First study examining IS governance–patient satisfaction link at small outpatient clinics using CG-CAHPS</a:t>
+              <a:t>• Design: Qualitative single case study</a:t>
             </a:r>
           </a:p>
           <a:p>
             <a:pPr>
               <a:spcAft>
-                <a:spcPts val="800"/>
+                <a:spcPts val="1000"/>
               </a:spcAft>
               <a:defRPr sz="1600">
                 <a:solidFill>
@@ -10533,13 +5776,13 @@
               </a:defRPr>
             </a:pPr>
             <a:r>
-              <a:t>• Extends hospital-focused research to where most Americans receive primary care</a:t>
+              <a:t>• Sample: 7 completed interviews from NP Clinic staff</a:t>
             </a:r>
           </a:p>
           <a:p>
             <a:pPr>
               <a:spcAft>
-                <a:spcPts val="800"/>
+                <a:spcPts val="1000"/>
               </a:spcAft>
               <a:defRPr sz="1600">
                 <a:solidFill>
@@ -10548,13 +5791,13 @@
               </a:defRPr>
             </a:pPr>
             <a:r>
-              <a:t>• Offers recommendations realistically implementable in resource-constrained settings</a:t>
+              <a:t>  – Track A: 2 IT/cybersecurity staff</a:t>
             </a:r>
           </a:p>
           <a:p>
             <a:pPr>
               <a:spcAft>
-                <a:spcPts val="800"/>
+                <a:spcPts val="1000"/>
               </a:spcAft>
               <a:defRPr sz="1600">
                 <a:solidFill>
@@ -10563,13 +5806,13 @@
               </a:defRPr>
             </a:pPr>
             <a:r>
-              <a:t>• Informs regulatory expectations for small covered entities</a:t>
+              <a:t>  – Track B: 5 clinical staff</a:t>
             </a:r>
           </a:p>
           <a:p>
             <a:pPr>
               <a:spcAft>
-                <a:spcPts val="800"/>
+                <a:spcPts val="1000"/>
               </a:spcAft>
               <a:defRPr sz="1600">
                 <a:solidFill>
@@ -10578,7 +5821,57 @@
               </a:defRPr>
             </a:pPr>
             <a:r>
-              <a:t>• Explores human and organizational factors that technical literature often overlooks</a:t>
+              <a:t>• Data Analysis: Reflexive thematic analysis</a:t>
+            </a:r>
+          </a:p>
+          <a:p>
+            <a:pPr>
+              <a:spcAft>
+                <a:spcPts val="1000"/>
+              </a:spcAft>
+              <a:defRPr sz="1600">
+                <a:solidFill>
+                  <a:srgbClr val="333333"/>
+                </a:solidFill>
+              </a:defRPr>
+            </a:pPr>
+            <a:r>
+              <a:t>• Framework: NIST, HIPAA, HICP standards</a:t>
+            </a:r>
+          </a:p>
+        </p:txBody>
+      </p:sp>
+      <p:sp>
+        <p:nvSpPr>
+          <p:cNvPr id="5" name="TextBox 4"/>
+          <p:cNvSpPr txBox="1"/>
+          <p:nvPr/>
+        </p:nvSpPr>
+        <p:spPr>
+          <a:xfrm>
+            <a:off x="640080" y="5943600"/>
+            <a:ext cx="8046720" cy="822960"/>
+          </a:xfrm>
+          <a:prstGeom prst="rect">
+            <a:avLst/>
+          </a:prstGeom>
+          <a:noFill/>
+        </p:spPr>
+        <p:txBody>
+          <a:bodyPr wrap="square">
+            <a:spAutoFit/>
+          </a:bodyPr>
+          <a:lstStyle/>
+          <a:p>
+            <a:pPr>
+              <a:defRPr sz="1000" i="1">
+                <a:solidFill>
+                  <a:srgbClr val="333333"/>
+                </a:solidFill>
+              </a:defRPr>
+            </a:pPr>
+            <a:r>
+              <a:t>(Braun &amp; Clarke, 2021)</a:t>
             </a:r>
           </a:p>
         </p:txBody>
@@ -10639,7 +5932,7 @@
               </a:defRPr>
             </a:pPr>
             <a:r>
-              <a:t>Research Questions</a:t>
+              <a:t>Finding 1: Governance Vacuum</a:t>
             </a:r>
           </a:p>
         </p:txBody>
@@ -10703,7 +5996,7 @@
           <a:p>
             <a:pPr>
               <a:spcAft>
-                <a:spcPts val="800"/>
+                <a:spcPts val="1000"/>
               </a:spcAft>
               <a:defRPr sz="1600">
                 <a:solidFill>
@@ -10712,13 +6005,13 @@
               </a:defRPr>
             </a:pPr>
             <a:r>
-              <a:t>• RQ1: How do clinical and IT/security staff characterize IS governance gaps at NP Clinic, and what factors prevent adoption of NIST, HIPAA, or HICP elements?</a:t>
+              <a:t>• No formal IS governance structure exists</a:t>
             </a:r>
           </a:p>
           <a:p>
             <a:pPr>
               <a:spcAft>
-                <a:spcPts val="800"/>
+                <a:spcPts val="1000"/>
               </a:spcAft>
               <a:defRPr sz="1600">
                 <a:solidFill>
@@ -10727,7 +6020,37 @@
               </a:defRPr>
             </a:pPr>
             <a:r>
-              <a:t>• RQ2: How do clinical staff perceive cybersecurity practices (or their absence) affecting patient experience, including responses to technology outages?</a:t>
+              <a:t>• Technology decisions driven by immediate operational need</a:t>
+            </a:r>
+          </a:p>
+          <a:p>
+            <a:pPr>
+              <a:spcAft>
+                <a:spcPts val="1000"/>
+              </a:spcAft>
+              <a:defRPr sz="1600">
+                <a:solidFill>
+                  <a:srgbClr val="333333"/>
+                </a:solidFill>
+              </a:defRPr>
+            </a:pPr>
+            <a:r>
+              <a:t>• Practice owner unaware of HIPAA or other cybersecurity requirements</a:t>
+            </a:r>
+          </a:p>
+          <a:p>
+            <a:pPr>
+              <a:spcAft>
+                <a:spcPts val="1000"/>
+              </a:spcAft>
+              <a:defRPr sz="1600">
+                <a:solidFill>
+                  <a:srgbClr val="333333"/>
+                </a:solidFill>
+              </a:defRPr>
+            </a:pPr>
+            <a:r>
+              <a:t>• No incident response plan or documented security procedures</a:t>
             </a:r>
           </a:p>
         </p:txBody>
@@ -10788,7 +6111,7 @@
               </a:defRPr>
             </a:pPr>
             <a:r>
-              <a:t>Methodology Overview</a:t>
+              <a:t>Finding 2: Knowledge Without Documentation</a:t>
             </a:r>
           </a:p>
         </p:txBody>
@@ -10852,7 +6175,7 @@
           <a:p>
             <a:pPr>
               <a:spcAft>
-                <a:spcPts val="800"/>
+                <a:spcPts val="1000"/>
               </a:spcAft>
               <a:defRPr sz="1600">
                 <a:solidFill>
@@ -10861,13 +6184,13 @@
               </a:defRPr>
             </a:pPr>
             <a:r>
-              <a:t>• Design: Qualitative single holistic case study</a:t>
+              <a:t>• IT staff know frameworks but nothing is written down</a:t>
             </a:r>
           </a:p>
           <a:p>
             <a:pPr>
               <a:spcAft>
-                <a:spcPts val="800"/>
+                <a:spcPts val="1000"/>
               </a:spcAft>
               <a:defRPr sz="1600">
                 <a:solidFill>
@@ -10876,13 +6199,13 @@
               </a:defRPr>
             </a:pPr>
             <a:r>
-              <a:t>• Data Collection: Semi-structured interviews (sole source per site authorization)</a:t>
+              <a:t>• Knowledge lives in individuals, not institutional processes</a:t>
             </a:r>
           </a:p>
           <a:p>
             <a:pPr>
               <a:spcAft>
-                <a:spcPts val="800"/>
+                <a:spcPts val="1000"/>
               </a:spcAft>
               <a:defRPr sz="1600">
                 <a:solidFill>
@@ -10891,13 +6214,13 @@
               </a:defRPr>
             </a:pPr>
             <a:r>
-              <a:t>• Sample: 8–10 participants (2 technical staff, 6–8 clinical staff)</a:t>
+              <a:t>• New staff and transitions become vulnerability points</a:t>
             </a:r>
           </a:p>
           <a:p>
             <a:pPr>
               <a:spcAft>
-                <a:spcPts val="800"/>
+                <a:spcPts val="1000"/>
               </a:spcAft>
               <a:defRPr sz="1600">
                 <a:solidFill>
@@ -10906,72 +6229,7 @@
               </a:defRPr>
             </a:pPr>
             <a:r>
-              <a:t>• Analysis: Reflexive thematic analysis (Braun &amp; Clarke, 2021)</a:t>
-            </a:r>
-          </a:p>
-          <a:p>
-            <a:pPr>
-              <a:spcAft>
-                <a:spcPts val="800"/>
-              </a:spcAft>
-              <a:defRPr sz="1600">
-                <a:solidFill>
-                  <a:srgbClr val="333333"/>
-                </a:solidFill>
-              </a:defRPr>
-            </a:pPr>
-            <a:r>
-              <a:t>• Frameworks: NIST Cybersecurity Framework, HIPAA Security Rule, HICP guidelines</a:t>
-            </a:r>
-          </a:p>
-          <a:p>
-            <a:pPr>
-              <a:spcAft>
-                <a:spcPts val="800"/>
-              </a:spcAft>
-              <a:defRPr sz="1600">
-                <a:solidFill>
-                  <a:srgbClr val="333333"/>
-                </a:solidFill>
-              </a:defRPr>
-            </a:pPr>
-            <a:r>
-              <a:t>• Outcome Measure: CG-CAHPS-aligned patient satisfaction</a:t>
-            </a:r>
-          </a:p>
-        </p:txBody>
-      </p:sp>
-      <p:sp>
-        <p:nvSpPr>
-          <p:cNvPr id="5" name="TextBox 4"/>
-          <p:cNvSpPr txBox="1"/>
-          <p:nvPr/>
-        </p:nvSpPr>
-        <p:spPr>
-          <a:xfrm>
-            <a:off x="640080" y="5943600"/>
-            <a:ext cx="8046720" cy="822960"/>
-          </a:xfrm>
-          <a:prstGeom prst="rect">
-            <a:avLst/>
-          </a:prstGeom>
-          <a:noFill/>
-        </p:spPr>
-        <p:txBody>
-          <a:bodyPr wrap="square">
-            <a:spAutoFit/>
-          </a:bodyPr>
-          <a:lstStyle/>
-          <a:p>
-            <a:pPr>
-              <a:defRPr sz="1000" i="1">
-                <a:solidFill>
-                  <a:srgbClr val="333333"/>
-                </a:solidFill>
-              </a:defRPr>
-            </a:pPr>
-            <a:r>
-              <a:t>(Miller et al., 2023; Braun &amp; Clarke, 2021)</a:t>
+              <a:t>• Framework awareness does not translate to implementation</a:t>
             </a:r>
           </a:p>
         </p:txBody>
@@ -11032,7 +6290,7 @@
               </a:defRPr>
             </a:pPr>
             <a:r>
-              <a:t>Description of the Problem</a:t>
+              <a:t>Finding 3: Vendor Dependency</a:t>
             </a:r>
           </a:p>
         </p:txBody>
@@ -11096,7 +6354,7 @@
           <a:p>
             <a:pPr>
               <a:spcAft>
-                <a:spcPts val="800"/>
+                <a:spcPts val="1000"/>
               </a:spcAft>
               <a:defRPr sz="1600">
                 <a:solidFill>
@@ -11105,13 +6363,13 @@
               </a:defRPr>
             </a:pPr>
             <a:r>
-              <a:t>• Healthcare has digitized rapidly; EHR systems now central to clinical operations</a:t>
+              <a:t>• EHR and scheduling systems hosted by vendors</a:t>
             </a:r>
           </a:p>
           <a:p>
             <a:pPr>
               <a:spcAft>
-                <a:spcPts val="800"/>
+                <a:spcPts val="1000"/>
               </a:spcAft>
               <a:defRPr sz="1600">
                 <a:solidFill>
@@ -11120,13 +6378,13 @@
               </a:defRPr>
             </a:pPr>
             <a:r>
-              <a:t>• Hospitals have begun formal IS governance; small practices typically have none</a:t>
+              <a:t>• Clinic has minimal visibility into security configurations</a:t>
             </a:r>
           </a:p>
           <a:p>
             <a:pPr>
               <a:spcAft>
-                <a:spcPts val="800"/>
+                <a:spcPts val="1000"/>
               </a:spcAft>
               <a:defRPr sz="1600">
                 <a:solidFill>
@@ -11135,13 +6393,13 @@
               </a:defRPr>
             </a:pPr>
             <a:r>
-              <a:t>• Small clinics operate with thin staffing, informal governance, outsourced IT support</a:t>
+              <a:t>• Outages beyond clinic control</a:t>
             </a:r>
           </a:p>
           <a:p>
             <a:pPr>
               <a:spcAft>
-                <a:spcPts val="800"/>
+                <a:spcPts val="1000"/>
               </a:spcAft>
               <a:defRPr sz="1600">
                 <a:solidFill>
@@ -11150,22 +6408,7 @@
               </a:defRPr>
             </a:pPr>
             <a:r>
-              <a:t>• NP Clinic reflects conditions common to independent outpatient practices nationally</a:t>
-            </a:r>
-          </a:p>
-          <a:p>
-            <a:pPr>
-              <a:spcAft>
-                <a:spcPts val="800"/>
-              </a:spcAft>
-              <a:defRPr sz="1600">
-                <a:solidFill>
-                  <a:srgbClr val="333333"/>
-                </a:solidFill>
-              </a:defRPr>
-            </a:pPr>
-            <a:r>
-              <a:t>• Relationship between IS governance and patient satisfaction at small practices unstudied</a:t>
+              <a:t>• Limited ability to implement local security controls</a:t>
             </a:r>
           </a:p>
         </p:txBody>
